--- a/course/lectures/act-2-building-systems-and-governing-changes/01-agent-levers/2-1-Agents.pptx
+++ b/course/lectures/act-2-building-systems-and-governing-changes/01-agent-levers/2-1-Agents.pptx
@@ -9,39 +9,45 @@
   </p:notesMasterIdLst>
   <p:sldIdLst>
     <p:sldId id="701" r:id="rId2"/>
-    <p:sldId id="702" r:id="rId3"/>
+    <p:sldId id="702" r:id="rId41"/>
     <p:sldId id="703" r:id="rId4"/>
-    <p:sldId id="704" r:id="rId5"/>
-    <p:sldId id="705" r:id="rId6"/>
-    <p:sldId id="706" r:id="rId7"/>
-    <p:sldId id="707" r:id="rId8"/>
-    <p:sldId id="708" r:id="rId9"/>
-    <p:sldId id="709" r:id="rId10"/>
-    <p:sldId id="710" r:id="rId11"/>
-    <p:sldId id="711" r:id="rId12"/>
-    <p:sldId id="712" r:id="rId13"/>
-    <p:sldId id="713" r:id="rId14"/>
-    <p:sldId id="714" r:id="rId15"/>
-    <p:sldId id="715" r:id="rId16"/>
-    <p:sldId id="716" r:id="rId17"/>
-    <p:sldId id="717" r:id="rId18"/>
-    <p:sldId id="718" r:id="rId19"/>
-    <p:sldId id="719" r:id="rId20"/>
-    <p:sldId id="720" r:id="rId21"/>
-    <p:sldId id="721" r:id="rId22"/>
-    <p:sldId id="722" r:id="rId23"/>
-    <p:sldId id="723" r:id="rId24"/>
-    <p:sldId id="724" r:id="rId25"/>
-    <p:sldId id="725" r:id="rId26"/>
-    <p:sldId id="726" r:id="rId27"/>
-    <p:sldId id="727" r:id="rId28"/>
-    <p:sldId id="728" r:id="rId29"/>
-    <p:sldId id="729" r:id="rId30"/>
-    <p:sldId id="730" r:id="rId36"/>
-    <p:sldId id="731" r:id="rId37"/>
-    <p:sldId id="732" r:id="rId38"/>
-    <p:sldId id="733" r:id="rId39"/>
-    <p:sldId id="734" r:id="rId40"/>
+    <p:sldId id="704" r:id="rId42"/>
+    <p:sldId id="705" r:id="rId43"/>
+    <p:sldId id="706" r:id="rId3"/>
+    <p:sldId id="707" r:id="rId5"/>
+    <p:sldId id="708" r:id="rId6"/>
+    <p:sldId id="709" r:id="rId7"/>
+    <p:sldId id="710" r:id="rId8"/>
+    <p:sldId id="711" r:id="rId9"/>
+    <p:sldId id="712" r:id="rId10"/>
+    <p:sldId id="713" r:id="rId11"/>
+    <p:sldId id="714" r:id="rId12"/>
+    <p:sldId id="715" r:id="rId13"/>
+    <p:sldId id="716" r:id="rId14"/>
+    <p:sldId id="717" r:id="rId15"/>
+    <p:sldId id="718" r:id="rId16"/>
+    <p:sldId id="719" r:id="rId17"/>
+    <p:sldId id="720" r:id="rId18"/>
+    <p:sldId id="721" r:id="rId19"/>
+    <p:sldId id="722" r:id="rId20"/>
+    <p:sldId id="723" r:id="rId21"/>
+    <p:sldId id="724" r:id="rId22"/>
+    <p:sldId id="725" r:id="rId23"/>
+    <p:sldId id="726" r:id="rId24"/>
+    <p:sldId id="727" r:id="rId25"/>
+    <p:sldId id="728" r:id="rId26"/>
+    <p:sldId id="729" r:id="rId27"/>
+    <p:sldId id="730" r:id="rId28"/>
+    <p:sldId id="731" r:id="rId29"/>
+    <p:sldId id="732" r:id="rId30"/>
+    <p:sldId id="733" r:id="rId36"/>
+    <p:sldId id="734" r:id="rId37"/>
+    <p:sldId id="735" r:id="rId44"/>
+    <p:sldId id="736" r:id="rId38"/>
+    <p:sldId id="737" r:id="rId39"/>
+    <p:sldId id="738" r:id="rId45"/>
+    <p:sldId id="739" r:id="rId46"/>
+    <p:sldId id="740" r:id="rId40"/>
   </p:sldIdLst>
   <p:sldSz cx="9144000" cy="6858000" type="screen4x3"/>
   <p:notesSz cx="6858000" cy="9144000"/>
@@ -536,7 +542,7 @@
             </a:r>
             <a:r>
               <a:rPr i="1" dirty="0"/>
-              <a:t>Open Act II: delegation to capable but fallible machines.</a:t>
+              <a:t xml:space="preserve">Open Act II: delegation to capable but fallible machines.</a:t>
             </a:r>
           </a:p>
           <a:p>
@@ -545,13 +551,19 @@
           <a:p>
             <a:r>
               <a:rPr dirty="0"/>
-              <a:t xml:space="preserve">- The strip is the lecture thesis in miniature: capability comes from a SYSTEM, not a model.</a:t>
+              <a:t xml:space="preserve">- The strip is the lecture thesis in miniature: BOUND → EQUIP → AUTHORIZE → VERIFY — delegation is designed, not just performed.</a:t>
             </a:r>
           </a:p>
           <a:p>
             <a:r>
               <a:rPr dirty="0"/>
-              <a:t xml:space="preserve">- Do not define agent yet; the definition is earned on slides 9-10.</a:t>
+              <a:t xml:space="preserve">- Do not define agent yet; the definition is earned in the harness subsection.</a:t>
+            </a:r>
+          </a:p>
+          <a:p>
+            <a:r>
+              <a:rPr dirty="0"/>
+              <a:t xml:space="preserve">- The model/harness/environment picture is coming — but as a submodel inside EQUIP, not the headline.</a:t>
             </a:r>
           </a:p>
         </p:txBody>
@@ -755,7 +767,7 @@
           <a:p>
             <a:r>
               <a:rPr dirty="0"/>
-              <a:t xml:space="preserve">- Work structure sits outside the ring on purpose: it changes the task, not the harness.</a:t>
+              <a:t xml:space="preserve">- Task structure is deliberately absent: it was decided under BOUND — it changes the task, not the harness.</a:t>
             </a:r>
           </a:p>
           <a:p>
@@ -899,7 +911,7 @@
           <a:p>
             <a:r>
               <a:rPr dirty="0"/>
-              <a:t xml:space="preserve">- Seed permissions here but do NOT teach authority yet — Section 5 owns that.</a:t>
+              <a:t xml:space="preserve">- Seed permissions here but do NOT teach authority yet — AUTHORIZE owns that.</a:t>
             </a:r>
           </a:p>
           <a:p>
@@ -1049,7 +1061,7 @@
           <a:p>
             <a:r>
               <a:rPr dirty="0"/>
-              <a:t xml:space="preserve">- First explicit link to Engineering Knowledge (Handbook ch. 4); Section 3 deepens it.</a:t>
+              <a:t xml:space="preserve">- First explicit link to Engineering Knowledge (Handbook ch. 4); the environment subsection deepens it.</a:t>
             </a:r>
           </a:p>
         </p:txBody>
@@ -1172,7 +1184,7 @@
             </a:r>
             <a:r>
               <a:rPr i="1" dirty="0"/>
-              <a:t>Name Section 3.</a:t>
+              <a:t>Name the EQUIP · environment subsection.</a:t>
             </a:r>
           </a:p>
           <a:p>
@@ -1298,7 +1310,7 @@
             </a:r>
             <a:r>
               <a:rPr i="1" dirty="0"/>
-              <a:t>The lecture thesis: capability is a property of the system.</a:t>
+              <a:t xml:space="preserve">EQUIP opens: capability is a property of a system.</a:t>
             </a:r>
           </a:p>
           <a:p>
@@ -1307,19 +1319,25 @@
           <a:p>
             <a:r>
               <a:rPr dirty="0"/>
-              <a:t xml:space="preserve">- This is the lander premise condensed to one visual claim.</a:t>
+              <a:t xml:space="preserve">- Role change: this strip now answers ONE of the four questions — what capability the agent brings to the bounded work.</a:t>
             </a:r>
           </a:p>
           <a:p>
             <a:r>
               <a:rPr dirty="0"/>
-              <a:t xml:space="preserve">- Each observation previews a section: models (S1), harnesses (S2), environments (S3).</a:t>
+              <a:t xml:space="preserve">- Each observation previews an EQUIP subsection: models, harnesses, environments.</a:t>
             </a:r>
           </a:p>
           <a:p>
             <a:r>
               <a:rPr dirty="0"/>
-              <a:t xml:space="preserve">- The footer line returns verbatim on the closing slide — say it aloud now.</a:t>
+              <a:t xml:space="preserve">- Say the boundary line aloud: these layers supply capability; they do not decide what to delegate, authorize, or accept.</a:t>
+            </a:r>
+          </a:p>
+          <a:p>
+            <a:r>
+              <a:rPr dirty="0"/>
+              <a:t xml:space="preserve">- The footer still holds — engineer the system, not merely the prompt — now scoped to EQUIP.</a:t>
             </a:r>
           </a:p>
         </p:txBody>
@@ -1370,7 +1388,7 @@
             </a:r>
             <a:r>
               <a:rPr i="1" dirty="0"/>
-              <a:t>The visual payoff of Section 2: zoom from model to environment.</a:t>
+              <a:t>The visual payoff of the harness subsection: zoom from model to environment.</a:t>
             </a:r>
           </a:p>
           <a:p>
@@ -1391,7 +1409,7 @@
           <a:p>
             <a:r>
               <a:rPr dirty="0"/>
-              <a:t xml:space="preserve">- Slides 20–23 are the intellectual heart of the first half; do not rush them.</a:t>
+              <a:t xml:space="preserve">- This run up to the EQUIP synthesis is the intellectual heart of the first half; do not rush it.</a:t>
             </a:r>
           </a:p>
         </p:txBody>
@@ -1463,7 +1481,7 @@
           <a:p>
             <a:r>
               <a:rPr dirty="0"/>
-              <a:t xml:space="preserve">- Foreshadow Section 4: this move — change what the reasoner is given — has a name coming.</a:t>
+              <a:t xml:space="preserve">- Foreshadow the reasoning horizon: this move — change what the reasoner is given — has a name coming.</a:t>
             </a:r>
           </a:p>
         </p:txBody>
@@ -1535,7 +1553,7 @@
           <a:p>
             <a:r>
               <a:rPr dirty="0"/>
-              <a:t xml:space="preserve">- The dependency-model option quietly previews Section 4’s representation lever — do not resolve it here.</a:t>
+              <a:t xml:space="preserve">- The dependency-model option quietly previews the representation lever of the horizon run — do not resolve it here.</a:t>
             </a:r>
           </a:p>
         </p:txBody>
@@ -1586,7 +1604,7 @@
             </a:r>
             <a:r>
               <a:rPr i="1" dirty="0"/>
-              <a:t>Synthesis before the break: the sum, not the model, performs.</a:t>
+              <a:t xml:space="preserve">The EQUIP synthesis — not the lecture synthesis.</a:t>
             </a:r>
           </a:p>
           <a:p>
@@ -1595,13 +1613,19 @@
           <a:p>
             <a:r>
               <a:rPr dirty="0"/>
-              <a:t xml:space="preserve">- Read the stack bottom-up once, top-down once.</a:t>
+              <a:t xml:space="preserve">- Read the stack once: model + harness + engineering environment → capability for the bounded work.</a:t>
             </a:r>
           </a:p>
           <a:p>
             <a:r>
               <a:rPr dirty="0"/>
-              <a:t xml:space="preserve">- This footer is the claim the second half will govern: if the system performs, the system must be controlled.</a:t>
+              <a:t xml:space="preserve">- Work structure is gone from the stack: BOUND already made that decision, on the task itself.</a:t>
+            </a:r>
+          </a:p>
+          <a:p>
+            <a:r>
+              <a:rPr dirty="0"/>
+              <a:t xml:space="preserve">- This closes ONE of four questions. The break question hands over to the rest: the horizon bridge, then AUTHORIZE and VERIFY.</a:t>
             </a:r>
           </a:p>
         </p:txBody>
@@ -1661,7 +1685,7 @@
           <a:p>
             <a:r>
               <a:rPr dirty="0"/>
-              <a:t xml:space="preserve">- The question tees up the entire second half: fit (Section 4) and control (Section 5).</a:t>
+              <a:t xml:space="preserve">- The question tees up the second half: the reasoning horizon bridges BOUND and EQUIP; then AUTHORIZE and VERIFY.</a:t>
             </a:r>
           </a:p>
         </p:txBody>
@@ -1736,6 +1760,12 @@
               <a:t xml:space="preserve">- Beyond the horizon work degrades into churn: repeated rediscovery, forgotten constraints, contradictory local decisions.</a:t>
             </a:r>
           </a:p>
+          <a:p>
+            <a:r>
+              <a:rPr dirty="0"/>
+              <a:t xml:space="preserve">- The footer is the BOUND ↔ EQUIP bridge: work that does not fit means move the boundary, or change what the agent has to reason with.</a:t>
+            </a:r>
+          </a:p>
         </p:txBody>
       </p:sp>
     </p:spTree>
@@ -1811,6 +1841,12 @@
           <a:p>
             <a:r>
               <a:rPr dirty="0"/>
+              <a:t xml:space="preserve">- The bottom lines enumerate the response space when work exceeds the horizon — reducing the task is re-BOUNDing. Neither knob is the default answer.</a:t>
+            </a:r>
+          </a:p>
+          <a:p>
+            <a:r>
+              <a:rPr dirty="0"/>
               <a:t xml:space="preserve">- BENCHMARK, not measure — the course established benchmarking in Act I.</a:t>
             </a:r>
           </a:p>
@@ -2078,7 +2114,7 @@
             </a:r>
             <a:r>
               <a:rPr i="1" dirty="0"/>
-              <a:t>Give the map: model inside harness inside environment.</a:t>
+              <a:t xml:space="preserve">The map of the day: four engineering decisions.</a:t>
             </a:r>
           </a:p>
           <a:p>
@@ -2087,13 +2123,19 @@
           <a:p>
             <a:r>
               <a:rPr dirty="0"/>
-              <a:t xml:space="preserve">- Point at each ring, then at each question; promise nothing else is coming today.</a:t>
+              <a:t xml:space="preserve">- Read each move with its question; this is the organizing model of the lecture.</a:t>
             </a:r>
           </a:p>
           <a:p>
             <a:r>
               <a:rPr dirty="0"/>
-              <a:t xml:space="preserve">- Q0 model · Q1 harness · Q2 environment · Q3 the second half (control).</a:t>
+              <a:t xml:space="preserve">- Stress the sub-line: the decisions interact — not a rigid pipeline. Better representations can enlarge a task; narrower authority can buy autonomy.</a:t>
+            </a:r>
+          </a:p>
+          <a:p>
+            <a:r>
+              <a:rPr dirty="0"/>
+              <a:t xml:space="preserve">- Promise the shape of the day: BOUND now, EQUIP until the break, the reasoning horizon as the bridge, then AUTHORIZE and VERIFY.</a:t>
             </a:r>
           </a:p>
         </p:txBody>
@@ -2144,7 +2186,7 @@
             </a:r>
             <a:r>
               <a:rPr i="1" dirty="0"/>
-              <a:t>Name Section 5 — the control problem.</a:t>
+              <a:t>Name AUTHORIZE — the control problem.</a:t>
             </a:r>
           </a:p>
           <a:p>
@@ -2222,6 +2264,12 @@
               <a:t xml:space="preserve">- Let the footer land in silence; it is the ethical spine of Act II.</a:t>
             </a:r>
           </a:p>
+          <a:p>
+            <a:r>
+              <a:rPr dirty="0"/>
+              <a:t xml:space="preserve">- The line is a callback to the ENGINEERING slide at the open: delegating realization never delegated responsibility.</a:t>
+            </a:r>
+          </a:p>
         </p:txBody>
       </p:sp>
     </p:spTree>
@@ -2270,7 +2318,7 @@
             </a:r>
             <a:r>
               <a:rPr i="1" dirty="0"/>
-              <a:t>The conceptual revelation of Section 5.</a:t>
+              <a:t>The conceptual revelation of AUTHORIZE.</a:t>
             </a:r>
           </a:p>
           <a:p>
@@ -2280,6 +2328,12 @@
             <a:r>
               <a:rPr dirty="0"/>
               <a:t xml:space="preserve">- One obligation, two very different realizations: helping the agent comply vs refusing the outcome.</a:t>
+            </a:r>
+          </a:p>
+          <a:p>
+            <a:r>
+              <a:rPr dirty="0"/>
+              <a:t xml:space="preserve">- The previous slide separated capability from authority; this one separates guidance from authority.</a:t>
             </a:r>
           </a:p>
           <a:p>
@@ -2342,7 +2396,7 @@
             </a:r>
             <a:r>
               <a:rPr i="1" dirty="0"/>
-              <a:t>Four grains of authority; leave the question unresolved.</a:t>
+              <a:t xml:space="preserve">Four grains where an obligation can act; leave the question unresolved.</a:t>
             </a:r>
           </a:p>
           <a:p>
@@ -2351,7 +2405,13 @@
           <a:p>
             <a:r>
               <a:rPr dirty="0"/>
-              <a:t xml:space="preserve">- Walk left to right: from shaping what the reasoner sees to guarding what the runtime does.</a:t>
+              <a:t xml:space="preserve">- Terminology care: the first column is guidance — it shapes reasoning; it does not bind outcomes the way permissions, admission, and runtime control do.</a:t>
+            </a:r>
+          </a:p>
+          <a:p>
+            <a:r>
+              <a:rPr dirty="0"/>
+              <a:t xml:space="preserve">- Walk left to right: guidance → action authority → admission → runtime control.</a:t>
             </a:r>
           </a:p>
           <a:p>
@@ -2414,7 +2474,7 @@
             </a:r>
             <a:r>
               <a:rPr i="1" dirty="0"/>
-              <a:t>The only summary slide; hand off to the rest of Act II.</a:t>
+              <a:t xml:space="preserve">The only summary slide; hand off to the rest of Act II.</a:t>
             </a:r>
           </a:p>
           <a:p>
@@ -2423,19 +2483,19 @@
           <a:p>
             <a:r>
               <a:rPr dirty="0"/>
-              <a:t xml:space="preserve">- Return of the thesis line and the system chain — nothing new, deliberately.</a:t>
+              <a:t xml:space="preserve">- Return of the four moves, now with their imperatives — nothing new, deliberately.</a:t>
             </a:r>
           </a:p>
           <a:p>
             <a:r>
               <a:rPr dirty="0"/>
-              <a:t xml:space="preserve">- Three forward questions name the next three units: Modeling, Alignment, Failure-Aware Engineering.</a:t>
+              <a:t xml:space="preserve">- Three forward questions name the next units: Modeling lives inside EQUIP; Alignment deepens AUTHORIZE and VERIFY.</a:t>
             </a:r>
           </a:p>
           <a:p>
             <a:r>
               <a:rPr dirty="0"/>
-              <a:t xml:space="preserve">- Final spoken line: the rest of Act II is about how to delegate realization without delegating engineering.</a:t>
+              <a:t xml:space="preserve">- Final spoken line: delegate realization — without delegating engineering. It lands because the lecture taught a model of delegation.</a:t>
             </a:r>
           </a:p>
         </p:txBody>
@@ -2445,6 +2505,381 @@
   <p:clrMapOvr>
     <a:masterClrMapping/>
   </p:clrMapOvr>
+</p:notes>
+</file>
+
+<file path=ppt/notesSlides/notesSlide35.xml><?xml version="1.0" encoding="utf-8"?>
+<p:notes xmlns:a="http://schemas.openxmlformats.org/drawingml/2006/main" xmlns:r="http://schemas.openxmlformats.org/officeDocument/2006/relationships" xmlns:p="http://schemas.openxmlformats.org/presentationml/2006/main">
+  <p:cSld>
+    <p:spTree>
+      <p:nvGrpSpPr>
+        <p:cNvPr id="1" name=""/>
+        <p:cNvGrpSpPr/>
+        <p:nvPr/>
+      </p:nvGrpSpPr>
+      <p:grpSpPr>
+        <a:xfrm>
+          <a:off x="0" y="0"/>
+          <a:ext cx="0" cy="0"/>
+          <a:chOff x="0" y="0"/>
+          <a:chExt cx="0" cy="0"/>
+        </a:xfrm>
+      </p:grpSpPr>
+      <p:sp>
+        <p:nvSpPr>
+          <p:cNvPr id="2" name="Notes Placeholder 1"/>
+          <p:cNvSpPr>
+            <a:spLocks noGrp="1"/>
+          </p:cNvSpPr>
+          <p:nvPr>
+            <p:ph type="body" idx="1"/>
+          </p:nvPr>
+        </p:nvSpPr>
+        <p:spPr/>
+        <p:txBody>
+          <a:bodyPr/>
+          <a:lstStyle/>
+          <a:p>
+            <a:r>
+              <a:rPr dirty="0"/>
+              <a:t xml:space="preserve">1 minute — </a:t>
+            </a:r>
+            <a:r>
+              <a:rPr i="1" dirty="0"/>
+              <a:t>Callback to Act I, not a new definition lecture.</a:t>
+            </a:r>
+          </a:p>
+          <a:p>
+            <a:endParaRPr dirty="0"/>
+          </a:p>
+          <a:p>
+            <a:r>
+              <a:rPr dirty="0"/>
+              <a:t xml:space="preserve">- Read the delegation clause once, slowly; do NOT re-teach the Engineering definition.</a:t>
+            </a:r>
+          </a:p>
+          <a:p>
+            <a:r>
+              <a:rPr dirty="0"/>
+              <a:t xml:space="preserve">- The transition line is the premise of the whole lecture: delegation itself must be engineered.</a:t>
+            </a:r>
+          </a:p>
+          <a:p>
+            <a:r>
+              <a:rPr dirty="0"/>
+              <a:t xml:space="preserve">- Say the four moves aloud once; every slide today answers one of them.</a:t>
+            </a:r>
+          </a:p>
+          <a:p>
+            <a:r>
+              <a:rPr dirty="0"/>
+              <a:t xml:space="preserve">- The ‘you cannot delegate responsibility’ line near the end of the lecture is a callback to THIS slide.</a:t>
+            </a:r>
+          </a:p>
+        </p:txBody>
+      </p:sp>
+    </p:spTree>
+  </p:cSld>
+</p:notes>
+</file>
+
+<file path=ppt/notesSlides/notesSlide36.xml><?xml version="1.0" encoding="utf-8"?>
+<p:notes xmlns:a="http://schemas.openxmlformats.org/drawingml/2006/main" xmlns:r="http://schemas.openxmlformats.org/officeDocument/2006/relationships" xmlns:p="http://schemas.openxmlformats.org/presentationml/2006/main">
+  <p:cSld>
+    <p:spTree>
+      <p:nvGrpSpPr>
+        <p:cNvPr id="1" name=""/>
+        <p:cNvGrpSpPr/>
+        <p:nvPr/>
+      </p:nvGrpSpPr>
+      <p:grpSpPr>
+        <a:xfrm>
+          <a:off x="0" y="0"/>
+          <a:ext cx="0" cy="0"/>
+          <a:chOff x="0" y="0"/>
+          <a:chExt cx="0" cy="0"/>
+        </a:xfrm>
+      </p:grpSpPr>
+      <p:sp>
+        <p:nvSpPr>
+          <p:cNvPr id="2" name="Notes Placeholder 1"/>
+          <p:cNvSpPr>
+            <a:spLocks noGrp="1"/>
+          </p:cNvSpPr>
+          <p:nvPr>
+            <p:ph type="body" idx="1"/>
+          </p:nvPr>
+        </p:nvSpPr>
+        <p:spPr/>
+        <p:txBody>
+          <a:bodyPr/>
+          <a:lstStyle/>
+          <a:p>
+            <a:r>
+              <a:rPr dirty="0"/>
+              <a:t xml:space="preserve">2.5 minutes — </a:t>
+            </a:r>
+            <a:r>
+              <a:rPr i="1" dirty="0"/>
+              <a:t>BOUND: the first delegation decision — design the work itself.</a:t>
+            </a:r>
+          </a:p>
+          <a:p>
+            <a:endParaRPr dirty="0"/>
+          </a:p>
+          <a:p>
+            <a:r>
+              <a:rPr dirty="0"/>
+              <a:t xml:space="preserve">- The point is NOT ‘make tasks small.’ The point is the footer: change the task to change the reasoning problem.</a:t>
+            </a:r>
+          </a:p>
+          <a:p>
+            <a:r>
+              <a:rPr dirty="0"/>
+              <a:t xml:space="preserve">- Walk the picture: one large task becomes coherent work units joined by explicit artifacts and checkpoints.</a:t>
+            </a:r>
+          </a:p>
+          <a:p>
+            <a:r>
+              <a:rPr dirty="0"/>
+              <a:t xml:space="preserve">- The tradeoff lines are the teaching: too broad overwhelms the horizon; too fragmented forces context across every boundary.</a:t>
+            </a:r>
+          </a:p>
+          <a:p>
+            <a:r>
+              <a:rPr dirty="0"/>
+              <a:t xml:space="preserve">- Reasoning horizon is only named here — the full treatment comes after the break.</a:t>
+            </a:r>
+          </a:p>
+        </p:txBody>
+      </p:sp>
+    </p:spTree>
+  </p:cSld>
+</p:notes>
+</file>
+
+<file path=ppt/notesSlides/notesSlide37.xml><?xml version="1.0" encoding="utf-8"?>
+<p:notes xmlns:a="http://schemas.openxmlformats.org/drawingml/2006/main" xmlns:r="http://schemas.openxmlformats.org/officeDocument/2006/relationships" xmlns:p="http://schemas.openxmlformats.org/presentationml/2006/main">
+  <p:cSld>
+    <p:spTree>
+      <p:nvGrpSpPr>
+        <p:cNvPr id="1" name=""/>
+        <p:cNvGrpSpPr/>
+        <p:nvPr/>
+      </p:nvGrpSpPr>
+      <p:grpSpPr>
+        <a:xfrm>
+          <a:off x="0" y="0"/>
+          <a:ext cx="0" cy="0"/>
+          <a:chOff x="0" y="0"/>
+          <a:chExt cx="0" cy="0"/>
+        </a:xfrm>
+      </p:grpSpPr>
+      <p:sp>
+        <p:nvSpPr>
+          <p:cNvPr id="2" name="Notes Placeholder 1"/>
+          <p:cNvSpPr>
+            <a:spLocks noGrp="1"/>
+          </p:cNvSpPr>
+          <p:nvPr>
+            <p:ph type="body" idx="1"/>
+          </p:nvPr>
+        </p:nvSpPr>
+        <p:spPr/>
+        <p:txBody>
+          <a:bodyPr/>
+          <a:lstStyle/>
+          <a:p>
+            <a:r>
+              <a:rPr dirty="0"/>
+              <a:t xml:space="preserve">2 minutes — </a:t>
+            </a:r>
+            <a:r>
+              <a:rPr i="1" dirty="0"/>
+              <a:t>The boundary question, stated carefully.</a:t>
+            </a:r>
+          </a:p>
+          <a:p>
+            <a:endParaRPr dirty="0"/>
+          </a:p>
+          <a:p>
+            <a:r>
+              <a:rPr dirty="0"/>
+              <a:t xml:space="preserve">- Read the three-line question as one sentence; it is the BOUND design criterion.</a:t>
+            </a:r>
+          </a:p>
+          <a:p>
+            <a:r>
+              <a:rPr dirty="0"/>
+              <a:t xml:space="preserve">- The five levers are how engineers move a boundary — scope, decomposition, interfaces, artifacts, checkpoints.</a:t>
+            </a:r>
+          </a:p>
+          <a:p>
+            <a:r>
+              <a:rPr dirty="0"/>
+              <a:t xml:space="preserve">- The preview line plants the bridge: the boundary decides the reasoning problem; the horizon section makes that precise.</a:t>
+            </a:r>
+          </a:p>
+          <a:p>
+            <a:r>
+              <a:rPr dirty="0"/>
+              <a:t xml:space="preserve">- Do not solve an example here; the TPS slides later do that work.</a:t>
+            </a:r>
+          </a:p>
+        </p:txBody>
+      </p:sp>
+    </p:spTree>
+  </p:cSld>
+</p:notes>
+</file>
+
+<file path=ppt/notesSlides/notesSlide38.xml><?xml version="1.0" encoding="utf-8"?>
+<p:notes xmlns:a="http://schemas.openxmlformats.org/drawingml/2006/main" xmlns:r="http://schemas.openxmlformats.org/officeDocument/2006/relationships" xmlns:p="http://schemas.openxmlformats.org/presentationml/2006/main">
+  <p:cSld>
+    <p:spTree>
+      <p:nvGrpSpPr>
+        <p:cNvPr id="1" name=""/>
+        <p:cNvGrpSpPr/>
+        <p:nvPr/>
+      </p:nvGrpSpPr>
+      <p:grpSpPr>
+        <a:xfrm>
+          <a:off x="0" y="0"/>
+          <a:ext cx="0" cy="0"/>
+          <a:chOff x="0" y="0"/>
+          <a:chExt cx="0" cy="0"/>
+        </a:xfrm>
+      </p:grpSpPr>
+      <p:sp>
+        <p:nvSpPr>
+          <p:cNvPr id="2" name="Notes Placeholder 1"/>
+          <p:cNvSpPr>
+            <a:spLocks noGrp="1"/>
+          </p:cNvSpPr>
+          <p:nvPr>
+            <p:ph type="body" idx="1"/>
+          </p:nvPr>
+        </p:nvSpPr>
+        <p:spPr/>
+        <p:txBody>
+          <a:bodyPr/>
+          <a:lstStyle/>
+          <a:p>
+            <a:r>
+              <a:rPr dirty="0"/>
+              <a:t xml:space="preserve">2 minutes — </a:t>
+            </a:r>
+            <a:r>
+              <a:rPr i="1" dirty="0"/>
+              <a:t>The AUTHORIZE hinge: same capability, five grants of authority.</a:t>
+            </a:r>
+          </a:p>
+          <a:p>
+            <a:endParaRPr dirty="0"/>
+          </a:p>
+          <a:p>
+            <a:r>
+              <a:rPr dirty="0"/>
+              <a:t xml:space="preserve">- Walk the chain left to right: the model never changes; the permitted consequence does.</a:t>
+            </a:r>
+          </a:p>
+          <a:p>
+            <a:r>
+              <a:rPr dirty="0"/>
+              <a:t xml:space="preserve">- Say it plainly: what an agent CAN do and what it MAY cause are separate engineering decisions.</a:t>
+            </a:r>
+          </a:p>
+          <a:p>
+            <a:r>
+              <a:rPr dirty="0"/>
+              <a:t xml:space="preserve">- This sets up ‘Guidance is not authority’ next — do not teach mechanisms yet.</a:t>
+            </a:r>
+          </a:p>
+          <a:p>
+            <a:r>
+              <a:rPr dirty="0"/>
+              <a:t xml:space="preserve">- Deliberately sparse; let the progression do the work.</a:t>
+            </a:r>
+          </a:p>
+        </p:txBody>
+      </p:sp>
+    </p:spTree>
+  </p:cSld>
+</p:notes>
+</file>
+
+<file path=ppt/notesSlides/notesSlide39.xml><?xml version="1.0" encoding="utf-8"?>
+<p:notes xmlns:a="http://schemas.openxmlformats.org/drawingml/2006/main" xmlns:r="http://schemas.openxmlformats.org/officeDocument/2006/relationships" xmlns:p="http://schemas.openxmlformats.org/presentationml/2006/main">
+  <p:cSld>
+    <p:spTree>
+      <p:nvGrpSpPr>
+        <p:cNvPr id="1" name=""/>
+        <p:cNvGrpSpPr/>
+        <p:nvPr/>
+      </p:nvGrpSpPr>
+      <p:grpSpPr>
+        <a:xfrm>
+          <a:off x="0" y="0"/>
+          <a:ext cx="0" cy="0"/>
+          <a:chOff x="0" y="0"/>
+          <a:chExt cx="0" cy="0"/>
+        </a:xfrm>
+      </p:grpSpPr>
+      <p:sp>
+        <p:nvSpPr>
+          <p:cNvPr id="2" name="Notes Placeholder 1"/>
+          <p:cNvSpPr>
+            <a:spLocks noGrp="1"/>
+          </p:cNvSpPr>
+          <p:nvPr>
+            <p:ph type="body" idx="1"/>
+          </p:nvPr>
+        </p:nvSpPr>
+        <p:spPr/>
+        <p:txBody>
+          <a:bodyPr/>
+          <a:lstStyle/>
+          <a:p>
+            <a:r>
+              <a:rPr dirty="0"/>
+              <a:t xml:space="preserve">2.5 minutes — </a:t>
+            </a:r>
+            <a:r>
+              <a:rPr i="1" dirty="0"/>
+              <a:t>VERIFY: decide what evidence closes the delegation — before the work begins.</a:t>
+            </a:r>
+          </a:p>
+          <a:p>
+            <a:endParaRPr dirty="0"/>
+          </a:p>
+          <a:p>
+            <a:r>
+              <a:rPr dirty="0"/>
+              <a:t xml:space="preserve">- Three delegated tasks, three evidence shapes; the burden scales with claims and consequences.</a:t>
+            </a:r>
+          </a:p>
+          <a:p>
+            <a:r>
+              <a:rPr dirty="0"/>
+              <a:t xml:space="preserve">- The claim lines are the content: the burden does not depend on who — or what — produced the artifact.</a:t>
+            </a:r>
+          </a:p>
+          <a:p>
+            <a:r>
+              <a:rPr dirty="0"/>
+              <a:t xml:space="preserve">- Do NOT reprise the Validation lecture; students know evidence. This puts evidence into the delegation model.</a:t>
+            </a:r>
+          </a:p>
+          <a:p>
+            <a:r>
+              <a:rPr dirty="0"/>
+              <a:t xml:space="preserve">- Alignment develops the machinery; here we only place the decision.</a:t>
+            </a:r>
+          </a:p>
+        </p:txBody>
+      </p:sp>
+    </p:spTree>
+  </p:cSld>
 </p:notes>
 </file>
 
@@ -2486,7 +2921,7 @@
             </a:r>
             <a:r>
               <a:rPr i="1" dirty="0"/>
-              <a:t>Name Section 1.</a:t>
+              <a:t>Name the EQUIP · model subsection.</a:t>
             </a:r>
           </a:p>
           <a:p>
@@ -2505,6 +2940,75 @@
   <p:clrMapOvr>
     <a:masterClrMapping/>
   </p:clrMapOvr>
+</p:notes>
+</file>
+
+<file path=ppt/notesSlides/notesSlide40.xml><?xml version="1.0" encoding="utf-8"?>
+<p:notes xmlns:a="http://schemas.openxmlformats.org/drawingml/2006/main" xmlns:r="http://schemas.openxmlformats.org/officeDocument/2006/relationships" xmlns:p="http://schemas.openxmlformats.org/presentationml/2006/main">
+  <p:cSld>
+    <p:spTree>
+      <p:nvGrpSpPr>
+        <p:cNvPr id="1" name=""/>
+        <p:cNvGrpSpPr/>
+        <p:nvPr/>
+      </p:nvGrpSpPr>
+      <p:grpSpPr>
+        <a:xfrm>
+          <a:off x="0" y="0"/>
+          <a:ext cx="0" cy="0"/>
+          <a:chOff x="0" y="0"/>
+          <a:chExt cx="0" cy="0"/>
+        </a:xfrm>
+      </p:grpSpPr>
+      <p:sp>
+        <p:nvSpPr>
+          <p:cNvPr id="2" name="Notes Placeholder 1"/>
+          <p:cNvSpPr>
+            <a:spLocks noGrp="1"/>
+          </p:cNvSpPr>
+          <p:nvPr>
+            <p:ph type="body" idx="1"/>
+          </p:nvPr>
+        </p:nvSpPr>
+        <p:spPr/>
+        <p:txBody>
+          <a:bodyPr/>
+          <a:lstStyle/>
+          <a:p>
+            <a:r>
+              <a:rPr dirty="0"/>
+              <a:t xml:space="preserve">1.5 minutes — </a:t>
+            </a:r>
+            <a:r>
+              <a:rPr i="1" dirty="0"/>
+              <a:t>Self-report is a claim, not independent evidence.</a:t>
+            </a:r>
+          </a:p>
+          <a:p>
+            <a:endParaRPr dirty="0"/>
+          </a:p>
+          <a:p>
+            <a:r>
+              <a:rPr dirty="0"/>
+              <a:t xml:space="preserve">- Walk the chain: the agent produces; the environment obtains and checks evidence; acceptance is an engineering decision.</a:t>
+            </a:r>
+          </a:p>
+          <a:p>
+            <a:r>
+              <a:rPr dirty="0"/>
+              <a:t xml:space="preserve">- An agent asserting ‘the tests pass’ is a claim to verify — exactly like a human author’s assertion.</a:t>
+            </a:r>
+          </a:p>
+          <a:p>
+            <a:r>
+              <a:rPr dirty="0"/>
+              <a:t xml:space="preserve">- One slide, one idea; resist mechanism details — Alignment owns enforcement.</a:t>
+            </a:r>
+          </a:p>
+        </p:txBody>
+      </p:sp>
+    </p:spTree>
+  </p:cSld>
 </p:notes>
 </file>
 
@@ -2768,7 +3272,7 @@
             </a:r>
             <a:r>
               <a:rPr i="1" dirty="0"/>
-              <a:t>Name Section 2.</a:t>
+              <a:t>Name the EQUIP · harness subsection.</a:t>
             </a:r>
           </a:p>
           <a:p>
@@ -6553,7 +7057,7 @@
                   <a:srgbClr val="8E6F3E"/>
                 </a:solidFill>
               </a:rPr>
-              <a:t xml:space="preserve">THE SYSTEM THIS LECTURE ASSEMBLES</a:t>
+              <a:t xml:space="preserve">THE MODEL THIS LECTURE BUILDS</a:t>
             </a:r>
           </a:p>
         </p:txBody>
@@ -6566,8 +7070,8 @@
         </p:nvSpPr>
         <p:spPr>
           <a:xfrm>
-            <a:off x="320040" y="4041648"/>
-            <a:ext cx="1371600" cy="731520"/>
+            <a:off x="717804" y="4041648"/>
+            <a:ext cx="1700784" cy="731520"/>
           </a:xfrm>
           <a:prstGeom prst="rect">
             <a:avLst/>
@@ -6594,58 +7098,43 @@
                   <a:srgbClr val="5C4826"/>
                 </a:solidFill>
               </a:rPr>
-              <a:t xml:space="preserve">MODEL</a:t>
-            </a:r>
-          </a:p>
-        </p:txBody>
-      </p:sp>
-      <p:sp>
-        <p:nvSpPr>
-          <p:cNvPr id="103" name="Plus0"/>
-          <p:cNvSpPr txBox="1"/>
-          <p:nvPr/>
-        </p:nvSpPr>
-        <p:spPr>
-          <a:xfrm>
-            <a:off x="1728216" y="4160520"/>
-            <a:ext cx="292608" cy="457200"/>
-          </a:xfrm>
-          <a:prstGeom prst="rect">
-            <a:avLst/>
-          </a:prstGeom>
-          <a:noFill/>
-          <a:ln>
-            <a:noFill/>
-          </a:ln>
-        </p:spPr>
-        <p:txBody>
-          <a:bodyPr wrap="square" lIns="0" tIns="0" rIns="0" bIns="0" anchor="t"/>
-          <a:lstStyle/>
-          <a:p>
-            <a:pPr algn="ctr">
-              <a:buNone/>
-            </a:pPr>
-            <a:r>
-              <a:rPr lang="en-US" sz="2800" b="1" i="0" dirty="0">
-                <a:solidFill>
-                  <a:srgbClr val="8E6F3E"/>
-                </a:solidFill>
-              </a:rPr>
-              <a:t xml:space="preserve">+</a:t>
-            </a:r>
-          </a:p>
-        </p:txBody>
-      </p:sp>
-      <p:sp>
-        <p:nvSpPr>
-          <p:cNvPr id="104" name="T1"/>
+              <a:t xml:space="preserve">BOUND</a:t>
+            </a:r>
+          </a:p>
+        </p:txBody>
+      </p:sp>
+      <p:cxnSp>
+        <p:nvCxnSpPr>
+          <p:cNvPr id="120" name="TA0"/>
+          <p:cNvCxnSpPr/>
+          <p:nvPr/>
+        </p:nvCxnSpPr>
+        <p:spPr>
+          <a:xfrm>
+            <a:off x="2432304" y="4407408"/>
+            <a:ext cx="274320" cy="0"/>
+          </a:xfrm>
+          <a:prstGeom prst="straightConnector1">
+            <a:avLst/>
+          </a:prstGeom>
+          <a:ln w="28575">
+            <a:solidFill>
+              <a:srgbClr val="8E6F3E"/>
+            </a:solidFill>
+            <a:tailEnd type="triangle" w="med" len="med"/>
+          </a:ln>
+        </p:spPr>
+      </p:cxnSp>
+      <p:sp>
+        <p:nvSpPr>
+          <p:cNvPr id="103" name="T1"/>
           <p:cNvSpPr/>
           <p:nvPr/>
         </p:nvSpPr>
         <p:spPr>
           <a:xfrm>
-            <a:off x="2057400" y="4041648"/>
-            <a:ext cx="1554480" cy="731520"/>
+            <a:off x="2720340" y="4041648"/>
+            <a:ext cx="1700784" cy="731520"/>
           </a:xfrm>
           <a:prstGeom prst="rect">
             <a:avLst/>
@@ -6672,58 +7161,43 @@
                   <a:srgbClr val="5C4826"/>
                 </a:solidFill>
               </a:rPr>
-              <a:t xml:space="preserve">HARNESS</a:t>
-            </a:r>
-          </a:p>
-        </p:txBody>
-      </p:sp>
-      <p:sp>
-        <p:nvSpPr>
-          <p:cNvPr id="105" name="Plus1"/>
-          <p:cNvSpPr txBox="1"/>
-          <p:nvPr/>
-        </p:nvSpPr>
-        <p:spPr>
-          <a:xfrm>
-            <a:off x="3648456" y="4160520"/>
-            <a:ext cx="292608" cy="457200"/>
-          </a:xfrm>
-          <a:prstGeom prst="rect">
-            <a:avLst/>
-          </a:prstGeom>
-          <a:noFill/>
-          <a:ln>
-            <a:noFill/>
-          </a:ln>
-        </p:spPr>
-        <p:txBody>
-          <a:bodyPr wrap="square" lIns="0" tIns="0" rIns="0" bIns="0" anchor="t"/>
-          <a:lstStyle/>
-          <a:p>
-            <a:pPr algn="ctr">
-              <a:buNone/>
-            </a:pPr>
-            <a:r>
-              <a:rPr lang="en-US" sz="2800" b="1" i="0" dirty="0">
-                <a:solidFill>
-                  <a:srgbClr val="8E6F3E"/>
-                </a:solidFill>
-              </a:rPr>
-              <a:t xml:space="preserve">+</a:t>
-            </a:r>
-          </a:p>
-        </p:txBody>
-      </p:sp>
-      <p:sp>
-        <p:nvSpPr>
-          <p:cNvPr id="106" name="T2"/>
+              <a:t xml:space="preserve">EQUIP</a:t>
+            </a:r>
+          </a:p>
+        </p:txBody>
+      </p:sp>
+      <p:cxnSp>
+        <p:nvCxnSpPr>
+          <p:cNvPr id="121" name="TA1"/>
+          <p:cNvCxnSpPr/>
+          <p:nvPr/>
+        </p:nvCxnSpPr>
+        <p:spPr>
+          <a:xfrm>
+            <a:off x="4434840" y="4407408"/>
+            <a:ext cx="274320" cy="0"/>
+          </a:xfrm>
+          <a:prstGeom prst="straightConnector1">
+            <a:avLst/>
+          </a:prstGeom>
+          <a:ln w="28575">
+            <a:solidFill>
+              <a:srgbClr val="8E6F3E"/>
+            </a:solidFill>
+            <a:tailEnd type="triangle" w="med" len="med"/>
+          </a:ln>
+        </p:spPr>
+      </p:cxnSp>
+      <p:sp>
+        <p:nvSpPr>
+          <p:cNvPr id="104" name="T2"/>
           <p:cNvSpPr/>
           <p:nvPr/>
         </p:nvSpPr>
         <p:spPr>
           <a:xfrm>
-            <a:off x="3977640" y="4041648"/>
-            <a:ext cx="2103120" cy="731520"/>
+            <a:off x="4722876" y="4041648"/>
+            <a:ext cx="1700784" cy="731520"/>
           </a:xfrm>
           <a:prstGeom prst="rect">
             <a:avLst/>
@@ -6750,26 +7224,26 @@
                   <a:srgbClr val="5C4826"/>
                 </a:solidFill>
               </a:rPr>
-              <a:t xml:space="preserve">ENVIRONMENT</a:t>
+              <a:t xml:space="preserve">AUTHORIZE</a:t>
             </a:r>
           </a:p>
         </p:txBody>
       </p:sp>
       <p:cxnSp>
         <p:nvCxnSpPr>
-          <p:cNvPr id="107" name="C102"/>
+          <p:cNvPr id="122" name="TA2"/>
           <p:cNvCxnSpPr/>
           <p:nvPr/>
         </p:nvCxnSpPr>
         <p:spPr>
           <a:xfrm>
-            <a:off x="6135624" y="4407408"/>
-            <a:ext cx="329184" cy="0"/>
+            <a:off x="6437376" y="4407408"/>
+            <a:ext cx="274320" cy="0"/>
           </a:xfrm>
           <a:prstGeom prst="straightConnector1">
             <a:avLst/>
           </a:prstGeom>
-          <a:ln w="44450">
+          <a:ln w="28575">
             <a:solidFill>
               <a:srgbClr val="8E6F3E"/>
             </a:solidFill>
@@ -6779,14 +7253,14 @@
       </p:cxnSp>
       <p:sp>
         <p:nvSpPr>
-          <p:cNvPr id="108" name="T3"/>
+          <p:cNvPr id="105" name="T3"/>
           <p:cNvSpPr/>
           <p:nvPr/>
         </p:nvSpPr>
         <p:spPr>
           <a:xfrm>
-            <a:off x="6519672" y="4041648"/>
-            <a:ext cx="2331720" cy="731520"/>
+            <a:off x="6725412" y="4041648"/>
+            <a:ext cx="1700784" cy="731520"/>
           </a:xfrm>
           <a:prstGeom prst="rect">
             <a:avLst/>
@@ -6813,7 +7287,7 @@
                   <a:srgbClr val="5C4826"/>
                 </a:solidFill>
               </a:rPr>
-              <a:t xml:space="preserve">ENGINEERING CAPABILITY</a:t>
+              <a:t xml:space="preserve">VERIFY</a:t>
             </a:r>
           </a:p>
         </p:txBody>
@@ -6866,7 +7340,7 @@
                   <a:srgbClr val="555960"/>
                 </a:solidFill>
               </a:rPr>
-              <a:t xml:space="preserve">Act II begins with machines that can do the building. Today: what they are made of.</a:t>
+              <a:t xml:space="preserve">Act II begins with machines that can do the building. Today: how to delegate.</a:t>
             </a:r>
           </a:p>
         </p:txBody>
@@ -6950,7 +7424,7 @@
           <a:p>
             <a:fld id="{B7EB45DA-9A0D-DC49-8E02-F30A5DDC21C3}" type="slidenum">
               <a:rPr lang="en-US" smtClean="0"/>
-              <a:t>10</a:t>
+              <a:t>13</a:t>
             </a:fld>
             <a:endParaRPr lang="en-US"/>
           </a:p>
@@ -7501,7 +7975,7 @@
           <a:p>
             <a:fld id="{B7EB45DA-9A0D-DC49-8E02-F30A5DDC21C3}" type="slidenum">
               <a:rPr lang="en-US" smtClean="0"/>
-              <a:t>11</a:t>
+              <a:t>14</a:t>
             </a:fld>
             <a:endParaRPr lang="en-US"/>
           </a:p>
@@ -8882,7 +9356,7 @@
           <a:p>
             <a:fld id="{B7EB45DA-9A0D-DC49-8E02-F30A5DDC21C3}" type="slidenum">
               <a:rPr lang="en-US" smtClean="0"/>
-              <a:t>12</a:t>
+              <a:t>15</a:t>
             </a:fld>
             <a:endParaRPr lang="en-US"/>
           </a:p>
@@ -9349,7 +9823,7 @@
                   <a:srgbClr val="555960"/>
                 </a:solidFill>
               </a:rPr>
-              <a:t xml:space="preserve">+ WORK STRUCTURE — applied to the task itself, not the harness</a:t>
+              <a:t xml:space="preserve">Task structure is absent on purpose — it was decided under BOUND.</a:t>
             </a:r>
           </a:p>
         </p:txBody>
@@ -9472,7 +9946,7 @@
           <a:p>
             <a:fld id="{B7EB45DA-9A0D-DC49-8E02-F30A5DDC21C3}" type="slidenum">
               <a:rPr lang="en-US" smtClean="0"/>
-              <a:t>13</a:t>
+              <a:t>16</a:t>
             </a:fld>
             <a:endParaRPr lang="en-US"/>
           </a:p>
@@ -9873,7 +10347,7 @@
           <a:p>
             <a:fld id="{B7EB45DA-9A0D-DC49-8E02-F30A5DDC21C3}" type="slidenum">
               <a:rPr lang="en-US" smtClean="0"/>
-              <a:t>14</a:t>
+              <a:t>17</a:t>
             </a:fld>
             <a:endParaRPr lang="en-US"/>
           </a:p>
@@ -10447,7 +10921,7 @@
           <a:p>
             <a:fld id="{B7EB45DA-9A0D-DC49-8E02-F30A5DDC21C3}" type="slidenum">
               <a:rPr lang="en-US" smtClean="0"/>
-              <a:t>15</a:t>
+              <a:t>18</a:t>
             </a:fld>
             <a:endParaRPr lang="en-US"/>
           </a:p>
@@ -10934,7 +11408,7 @@
           <a:p>
             <a:fld id="{B7EB45DA-9A0D-DC49-8E02-F30A5DDC21C3}" type="slidenum">
               <a:rPr lang="en-US" smtClean="0"/>
-              <a:t>16</a:t>
+              <a:t>19</a:t>
             </a:fld>
             <a:endParaRPr lang="en-US"/>
           </a:p>
@@ -11372,7 +11846,7 @@
           <a:p>
             <a:fld id="{B7EB45DA-9A0D-DC49-8E02-F30A5DDC21C3}" type="slidenum">
               <a:rPr lang="en-US" smtClean="0"/>
-              <a:t>17</a:t>
+              <a:t>20</a:t>
             </a:fld>
             <a:endParaRPr lang="en-US"/>
           </a:p>
@@ -11901,7 +12375,7 @@
                   <a:srgbClr val="8E6F3E"/>
                 </a:solidFill>
               </a:rPr>
-              <a:t>SECTION 3</a:t>
+              <a:t>EQUIP · THE ENVIRONMENT</a:t>
             </a:r>
           </a:p>
         </p:txBody>
@@ -11923,7 +12397,7 @@
           <a:p>
             <a:fld id="{B7EB45DA-9A0D-DC49-8E02-F30A5DDC21C3}" type="slidenum">
               <a:rPr lang="en-US" smtClean="0"/>
-              <a:t>18</a:t>
+              <a:t>21</a:t>
             </a:fld>
             <a:endParaRPr lang="en-US"/>
           </a:p>
@@ -12037,7 +12511,7 @@
           <a:p>
             <a:fld id="{B7EB45DA-9A0D-DC49-8E02-F30A5DDC21C3}" type="slidenum">
               <a:rPr lang="en-US" smtClean="0"/>
-              <a:t>19</a:t>
+              <a:t>22</a:t>
             </a:fld>
             <a:endParaRPr lang="en-US"/>
           </a:p>
@@ -12574,7 +13048,7 @@
                   <a:srgbClr val="000000"/>
                 </a:solidFill>
               </a:rPr>
-              <a:t>Agent capability belongs to the system</a:t>
+              <a:t>EQUIP: where does capability live?</a:t>
             </a:r>
           </a:p>
         </p:txBody>
@@ -12596,7 +13070,7 @@
           <a:p>
             <a:fld id="{B7EB45DA-9A0D-DC49-8E02-F30A5DDC21C3}" type="slidenum">
               <a:rPr lang="en-US" smtClean="0"/>
-              <a:t>2</a:t>
+              <a:t>6</a:t>
             </a:fld>
             <a:endParaRPr lang="en-US"/>
           </a:p>
@@ -12927,6 +13401,35 @@
                 </a:solidFill>
               </a:rPr>
               <a:t xml:space="preserve">Environments determine what work requires reasoning.</a:t>
+            </a:r>
+          </a:p>
+          <a:p>
+            <a:pPr algn="ctr">
+              <a:spcBef>
+                <a:spcPts val="300"/>
+              </a:spcBef>
+              <a:buNone/>
+            </a:pPr>
+            <a:r>
+              <a:rPr lang="en-US" sz="2000" b="0" i="1" dirty="0">
+                <a:solidFill>
+                  <a:srgbClr val="555960"/>
+                </a:solidFill>
+              </a:rPr>
+              <a:t xml:space="preserve">These layers supply capability for the bounded work. They do not decide</a:t>
+            </a:r>
+          </a:p>
+          <a:p>
+            <a:pPr algn="ctr">
+              <a:buNone/>
+            </a:pPr>
+            <a:r>
+              <a:rPr lang="en-US" sz="2000" b="0" i="1" dirty="0">
+                <a:solidFill>
+                  <a:srgbClr val="555960"/>
+                </a:solidFill>
+              </a:rPr>
+              <a:t xml:space="preserve">what to delegate, what to authorize, or what evidence to require.</a:t>
             </a:r>
           </a:p>
         </p:txBody>
@@ -13049,7 +13552,7 @@
           <a:p>
             <a:fld id="{B7EB45DA-9A0D-DC49-8E02-F30A5DDC21C3}" type="slidenum">
               <a:rPr lang="en-US" smtClean="0"/>
-              <a:t>20</a:t>
+              <a:t>23</a:t>
             </a:fld>
             <a:endParaRPr lang="en-US"/>
           </a:p>
@@ -13340,7 +13843,7 @@
                   <a:srgbClr val="FFFFFF"/>
                 </a:solidFill>
               </a:rPr>
-              <a:t xml:space="preserve">The map from slide 3 — now with every layer filled in.</a:t>
+              <a:t xml:space="preserve">The EQUIP submodel — now with every layer filled in.</a:t>
             </a:r>
           </a:p>
         </p:txBody>
@@ -13753,7 +14256,7 @@
           <a:p>
             <a:fld id="{B7EB45DA-9A0D-DC49-8E02-F30A5DDC21C3}" type="slidenum">
               <a:rPr lang="en-US" smtClean="0"/>
-              <a:t>21</a:t>
+              <a:t>24</a:t>
             </a:fld>
             <a:endParaRPr lang="en-US"/>
           </a:p>
@@ -14233,7 +14736,7 @@
           <a:p>
             <a:fld id="{B7EB45DA-9A0D-DC49-8E02-F30A5DDC21C3}" type="slidenum">
               <a:rPr lang="en-US" smtClean="0"/>
-              <a:t>22</a:t>
+              <a:t>25</a:t>
             </a:fld>
             <a:endParaRPr lang="en-US"/>
           </a:p>
@@ -15208,7 +15711,7 @@
                   <a:srgbClr val="000000"/>
                 </a:solidFill>
               </a:rPr>
-              <a:t>Engineer the whole system</a:t>
+              <a:t>Equip the agent</a:t>
             </a:r>
           </a:p>
         </p:txBody>
@@ -15230,7 +15733,7 @@
           <a:p>
             <a:fld id="{B7EB45DA-9A0D-DC49-8E02-F30A5DDC21C3}" type="slidenum">
               <a:rPr lang="en-US" smtClean="0"/>
-              <a:t>23</a:t>
+              <a:t>26</a:t>
             </a:fld>
             <a:endParaRPr lang="en-US"/>
           </a:p>
@@ -15433,84 +15936,6 @@
           </a:p>
         </p:txBody>
       </p:sp>
-      <p:sp>
-        <p:nvSpPr>
-          <p:cNvPr id="105" name="Pl2"/>
-          <p:cNvSpPr txBox="1"/>
-          <p:nvPr/>
-        </p:nvSpPr>
-        <p:spPr>
-          <a:xfrm>
-            <a:off x="4425696" y="3300984"/>
-            <a:ext cx="329184" cy="329184"/>
-          </a:xfrm>
-          <a:prstGeom prst="rect">
-            <a:avLst/>
-          </a:prstGeom>
-          <a:noFill/>
-          <a:ln>
-            <a:noFill/>
-          </a:ln>
-        </p:spPr>
-        <p:txBody>
-          <a:bodyPr wrap="square" lIns="0" tIns="0" rIns="0" bIns="0" anchor="t"/>
-          <a:lstStyle/>
-          <a:p>
-            <a:pPr algn="ctr">
-              <a:buNone/>
-            </a:pPr>
-            <a:r>
-              <a:rPr lang="en-US" sz="2400" b="1" i="0" dirty="0">
-                <a:solidFill>
-                  <a:srgbClr val="8E6F3E"/>
-                </a:solidFill>
-              </a:rPr>
-              <a:t xml:space="preserve">+</a:t>
-            </a:r>
-          </a:p>
-        </p:txBody>
-      </p:sp>
-      <p:sp>
-        <p:nvSpPr>
-          <p:cNvPr id="106" name="S3"/>
-          <p:cNvSpPr/>
-          <p:nvPr/>
-        </p:nvSpPr>
-        <p:spPr>
-          <a:xfrm>
-            <a:off x="2651760" y="3648456"/>
-            <a:ext cx="3840480" cy="566928"/>
-          </a:xfrm>
-          <a:prstGeom prst="rect">
-            <a:avLst/>
-          </a:prstGeom>
-          <a:solidFill>
-            <a:srgbClr val="F5F1E8"/>
-          </a:solidFill>
-          <a:ln w="12700">
-            <a:solidFill>
-              <a:srgbClr val="C9B991"/>
-            </a:solidFill>
-          </a:ln>
-        </p:spPr>
-        <p:txBody>
-          <a:bodyPr wrap="square" lIns="27432" tIns="22860" rIns="27432" bIns="22860" anchor="ctr"/>
-          <a:lstStyle/>
-          <a:p>
-            <a:pPr algn="ctr">
-              <a:buNone/>
-            </a:pPr>
-            <a:r>
-              <a:rPr lang="en-US" sz="2000" b="1" i="0" dirty="0">
-                <a:solidFill>
-                  <a:srgbClr val="5C4826"/>
-                </a:solidFill>
-              </a:rPr>
-              <a:t xml:space="preserve">WORK STRUCTURE</a:t>
-            </a:r>
-          </a:p>
-        </p:txBody>
-      </p:sp>
       <p:cxnSp>
         <p:nvCxnSpPr>
           <p:cNvPr id="107" name="Down"/>
@@ -15519,7 +15944,7 @@
         </p:nvCxnSpPr>
         <p:spPr>
           <a:xfrm>
-            <a:off x="4572000" y="4215384"/>
+            <a:off x="4572000" y="3438000"/>
             <a:ext cx="0" cy="384048"/>
           </a:xfrm>
           <a:prstGeom prst="straightConnector1">
@@ -15541,8 +15966,8 @@
         </p:nvSpPr>
         <p:spPr>
           <a:xfrm>
-            <a:off x="2651760" y="4690872"/>
-            <a:ext cx="3840480" cy="685800"/>
+            <a:off x="2172000" y="3960000"/>
+            <a:ext cx="4800000" cy="685800"/>
           </a:xfrm>
           <a:prstGeom prst="rect">
             <a:avLst/>
@@ -15569,7 +15994,44 @@
                   <a:srgbClr val="5C4826"/>
                 </a:solidFill>
               </a:rPr>
-              <a:t xml:space="preserve">OBSERVED CAPABILITY</a:t>
+              <a:t xml:space="preserve">CAPABILITY FOR THE BOUNDED WORK</a:t>
+            </a:r>
+          </a:p>
+        </p:txBody>
+      </p:sp>
+      <p:sp>
+        <p:nvSpPr>
+          <p:cNvPr id="130" name="BoundNote"/>
+          <p:cNvSpPr txBox="1"/>
+          <p:nvPr/>
+        </p:nvSpPr>
+        <p:spPr>
+          <a:xfrm>
+            <a:off x="274320" y="4983480"/>
+            <a:ext cx="8595360" cy="411480"/>
+          </a:xfrm>
+          <a:prstGeom prst="rect">
+            <a:avLst/>
+          </a:prstGeom>
+          <a:noFill/>
+          <a:ln>
+            <a:noFill/>
+          </a:ln>
+        </p:spPr>
+        <p:txBody>
+          <a:bodyPr wrap="square" lIns="0" tIns="0" rIns="0" bIns="0" anchor="t"/>
+          <a:lstStyle/>
+          <a:p>
+            <a:pPr algn="ctr">
+              <a:buNone/>
+            </a:pPr>
+            <a:r>
+              <a:rPr lang="en-US" sz="2000" b="0" i="1" dirty="0">
+                <a:solidFill>
+                  <a:srgbClr val="555960"/>
+                </a:solidFill>
+              </a:rPr>
+              <a:t xml:space="preserve">Task structure already shaped the work — under BOUND.</a:t>
             </a:r>
           </a:p>
         </p:txBody>
@@ -15721,7 +16183,7 @@
                   <a:srgbClr val="8E6F3E"/>
                 </a:solidFill>
               </a:rPr>
-              <a:t>STRETCH BREAK · THEN SECTION 4</a:t>
+              <a:t>STRETCH BREAK · THEN: THE REASONING HORIZON</a:t>
             </a:r>
           </a:p>
         </p:txBody>
@@ -15743,7 +16205,7 @@
           <a:p>
             <a:fld id="{B7EB45DA-9A0D-DC49-8E02-F30A5DDC21C3}" type="slidenum">
               <a:rPr lang="en-US" smtClean="0"/>
-              <a:t>24</a:t>
+              <a:t>27</a:t>
             </a:fld>
             <a:endParaRPr lang="en-US"/>
           </a:p>
@@ -15894,7 +16356,7 @@
           <a:p>
             <a:fld id="{B7EB45DA-9A0D-DC49-8E02-F30A5DDC21C3}" type="slidenum">
               <a:rPr lang="en-US" smtClean="0"/>
-              <a:t>25</a:t>
+              <a:t>28</a:t>
             </a:fld>
             <a:endParaRPr lang="en-US"/>
           </a:p>
@@ -16222,7 +16684,7 @@
                   <a:srgbClr val="FFFFFF"/>
                 </a:solidFill>
               </a:rPr>
-              <a:t xml:space="preserve">Finite effective reasoning state — the constraint Section 4 engineers around.</a:t>
+              <a:t xml:space="preserve">Work that does not fit: change the boundary — or what the agent reasons with.</a:t>
             </a:r>
           </a:p>
         </p:txBody>
@@ -16306,7 +16768,7 @@
           <a:p>
             <a:fld id="{B7EB45DA-9A0D-DC49-8E02-F30A5DDC21C3}" type="slidenum">
               <a:rPr lang="en-US" smtClean="0"/>
-              <a:t>26</a:t>
+              <a:t>29</a:t>
             </a:fld>
             <a:endParaRPr lang="en-US"/>
           </a:p>
@@ -16799,7 +17261,23 @@
                   <a:srgbClr val="555960"/>
                 </a:solidFill>
               </a:rPr>
-              <a:t xml:space="preserve">Alternative engineering investments — neither is the default answer.</a:t>
+              <a:t xml:space="preserve">reduce the task · improve the representation · retrieve context</a:t>
+            </a:r>
+          </a:p>
+          <a:p>
+            <a:pPr algn="ctr">
+              <a:spcBef>
+                <a:spcPts val="120"/>
+              </a:spcBef>
+              <a:buNone/>
+            </a:pPr>
+            <a:r>
+              <a:rPr lang="en-US" sz="2000" b="0" i="1" dirty="0">
+                <a:solidFill>
+                  <a:srgbClr val="555960"/>
+                </a:solidFill>
+              </a:rPr>
+              <a:t xml:space="preserve">externalize state · provide tools · improve the reasoner</a:t>
             </a:r>
           </a:p>
         </p:txBody>
@@ -17440,7 +17918,7 @@
           <a:p>
             <a:fld id="{B7EB45DA-9A0D-DC49-8E02-F30A5DDC21C3}" type="slidenum">
               <a:rPr lang="en-US" smtClean="0"/>
-              <a:t>27</a:t>
+              <a:t>30</a:t>
             </a:fld>
             <a:endParaRPr lang="en-US"/>
           </a:p>
@@ -17902,7 +18380,7 @@
           <a:p>
             <a:fld id="{B7EB45DA-9A0D-DC49-8E02-F30A5DDC21C3}" type="slidenum">
               <a:rPr lang="en-US" smtClean="0"/>
-              <a:t>28</a:t>
+              <a:t>31</a:t>
             </a:fld>
             <a:endParaRPr lang="en-US"/>
           </a:p>
@@ -18608,7 +19086,7 @@
           <a:p>
             <a:fld id="{B7EB45DA-9A0D-DC49-8E02-F30A5DDC21C3}" type="slidenum">
               <a:rPr lang="en-US" smtClean="0"/>
-              <a:t>29</a:t>
+              <a:t>32</a:t>
             </a:fld>
             <a:endParaRPr lang="en-US"/>
           </a:p>
@@ -19291,7 +19769,7 @@
                   <a:srgbClr val="000000"/>
                 </a:solidFill>
               </a:rPr>
-              <a:t>Today we will build one model</a:t>
+              <a:t>Delegation is an engineering design problem</a:t>
             </a:r>
           </a:p>
         </p:txBody>
@@ -19321,82 +19799,14 @@
       </p:sp>
       <p:sp>
         <p:nvSpPr>
-          <p:cNvPr id="100" name="Env"/>
+          <p:cNvPr id="100" name="M0"/>
           <p:cNvSpPr/>
           <p:nvPr/>
         </p:nvSpPr>
         <p:spPr>
           <a:xfrm>
-            <a:off x="2286000" y="1234440"/>
-            <a:ext cx="4572000" cy="3200400"/>
-          </a:xfrm>
-          <a:prstGeom prst="rect">
-            <a:avLst/>
-          </a:prstGeom>
-          <a:solidFill>
-            <a:srgbClr val="FBF8F2"/>
-          </a:solidFill>
-          <a:ln w="12700">
-            <a:solidFill>
-              <a:srgbClr val="C9B991"/>
-            </a:solidFill>
-          </a:ln>
-        </p:spPr>
-        <p:txBody>
-          <a:bodyPr wrap="square" lIns="27432" tIns="22860" rIns="27432" bIns="22860" anchor="ctr"/>
-          <a:lstStyle/>
-          <a:p>
-            <a:endParaRPr/>
-          </a:p>
-        </p:txBody>
-      </p:sp>
-      <p:sp>
-        <p:nvSpPr>
-          <p:cNvPr id="101" name="EnvLbl"/>
-          <p:cNvSpPr txBox="1"/>
-          <p:nvPr/>
-        </p:nvSpPr>
-        <p:spPr>
-          <a:xfrm>
-            <a:off x="2468880" y="1371600"/>
-            <a:ext cx="4206240" cy="365760"/>
-          </a:xfrm>
-          <a:prstGeom prst="rect">
-            <a:avLst/>
-          </a:prstGeom>
-          <a:noFill/>
-          <a:ln>
-            <a:noFill/>
-          </a:ln>
-        </p:spPr>
-        <p:txBody>
-          <a:bodyPr wrap="square" lIns="0" tIns="0" rIns="0" bIns="0" anchor="t"/>
-          <a:lstStyle/>
-          <a:p>
-            <a:pPr algn="ctr">
-              <a:buNone/>
-            </a:pPr>
-            <a:r>
-              <a:rPr lang="en-US" sz="2000" b="1" i="0" dirty="0">
-                <a:solidFill>
-                  <a:srgbClr val="8E6F3E"/>
-                </a:solidFill>
-              </a:rPr>
-              <a:t xml:space="preserve">ENGINEERING ENVIRONMENT</a:t>
-            </a:r>
-          </a:p>
-        </p:txBody>
-      </p:sp>
-      <p:sp>
-        <p:nvSpPr>
-          <p:cNvPr id="102" name="Har"/>
-          <p:cNvSpPr/>
-          <p:nvPr/>
-        </p:nvSpPr>
-        <p:spPr>
-          <a:xfrm>
-            <a:off x="3017520" y="1920240"/>
-            <a:ext cx="3108960" cy="2148840"/>
+            <a:off x="685800" y="1234440"/>
+            <a:ext cx="2103120" cy="640080"/>
           </a:xfrm>
           <a:prstGeom prst="rect">
             <a:avLst/>
@@ -19414,20 +19824,30 @@
           <a:bodyPr wrap="square" lIns="27432" tIns="22860" rIns="27432" bIns="22860" anchor="ctr"/>
           <a:lstStyle/>
           <a:p>
-            <a:endParaRPr/>
-          </a:p>
-        </p:txBody>
-      </p:sp>
-      <p:sp>
-        <p:nvSpPr>
-          <p:cNvPr id="103" name="HarLbl"/>
+            <a:pPr algn="ctr">
+              <a:buNone/>
+            </a:pPr>
+            <a:r>
+              <a:rPr lang="en-US" sz="2000" b="1" i="0" dirty="0">
+                <a:solidFill>
+                  <a:srgbClr val="5C4826"/>
+                </a:solidFill>
+              </a:rPr>
+              <a:t xml:space="preserve">BOUND</a:t>
+            </a:r>
+          </a:p>
+        </p:txBody>
+      </p:sp>
+      <p:sp>
+        <p:nvSpPr>
+          <p:cNvPr id="110" name="Q0"/>
           <p:cNvSpPr txBox="1"/>
           <p:nvPr/>
         </p:nvSpPr>
         <p:spPr>
           <a:xfrm>
-            <a:off x="3200400" y="2029968"/>
-            <a:ext cx="2743200" cy="365760"/>
+            <a:off x="3063240" y="1371600"/>
+            <a:ext cx="5715000" cy="411480"/>
           </a:xfrm>
           <a:prstGeom prst="rect">
             <a:avLst/>
@@ -19441,6 +19861,47 @@
           <a:bodyPr wrap="square" lIns="0" tIns="0" rIns="0" bIns="0" anchor="t"/>
           <a:lstStyle/>
           <a:p>
+            <a:pPr algn="l">
+              <a:buNone/>
+            </a:pPr>
+            <a:r>
+              <a:rPr lang="en-US" sz="2000" b="0" i="1" dirty="0">
+                <a:solidFill>
+                  <a:srgbClr val="8E6F3E"/>
+                </a:solidFill>
+              </a:rPr>
+              <a:t xml:space="preserve">What work are we delegating?</a:t>
+            </a:r>
+          </a:p>
+        </p:txBody>
+      </p:sp>
+      <p:sp>
+        <p:nvSpPr>
+          <p:cNvPr id="101" name="M1"/>
+          <p:cNvSpPr/>
+          <p:nvPr/>
+        </p:nvSpPr>
+        <p:spPr>
+          <a:xfrm>
+            <a:off x="685800" y="2011680"/>
+            <a:ext cx="2103120" cy="640080"/>
+          </a:xfrm>
+          <a:prstGeom prst="rect">
+            <a:avLst/>
+          </a:prstGeom>
+          <a:solidFill>
+            <a:srgbClr val="F5F1E8"/>
+          </a:solidFill>
+          <a:ln w="12700">
+            <a:solidFill>
+              <a:srgbClr val="C9B991"/>
+            </a:solidFill>
+          </a:ln>
+        </p:spPr>
+        <p:txBody>
+          <a:bodyPr wrap="square" lIns="27432" tIns="22860" rIns="27432" bIns="22860" anchor="ctr"/>
+          <a:lstStyle/>
+          <a:p>
             <a:pPr algn="ctr">
               <a:buNone/>
             </a:pPr>
@@ -19450,62 +19911,21 @@
                   <a:srgbClr val="5C4826"/>
                 </a:solidFill>
               </a:rPr>
-              <a:t xml:space="preserve">AGENT HARNESS</a:t>
-            </a:r>
-          </a:p>
-        </p:txBody>
-      </p:sp>
-      <p:sp>
-        <p:nvSpPr>
-          <p:cNvPr id="104" name="Mod"/>
-          <p:cNvSpPr/>
-          <p:nvPr/>
-        </p:nvSpPr>
-        <p:spPr>
-          <a:xfrm>
-            <a:off x="3794760" y="2697480"/>
-            <a:ext cx="1554480" cy="868680"/>
-          </a:xfrm>
-          <a:prstGeom prst="rect">
-            <a:avLst/>
-          </a:prstGeom>
-          <a:solidFill>
-            <a:srgbClr val="FFFFFF"/>
-          </a:solidFill>
-          <a:ln w="19050">
-            <a:solidFill>
-              <a:srgbClr val="8E6F3E"/>
-            </a:solidFill>
-          </a:ln>
-        </p:spPr>
-        <p:txBody>
-          <a:bodyPr wrap="square" lIns="27432" tIns="22860" rIns="27432" bIns="22860" anchor="ctr"/>
-          <a:lstStyle/>
-          <a:p>
-            <a:pPr algn="ctr">
-              <a:buNone/>
-            </a:pPr>
-            <a:r>
-              <a:rPr lang="en-US" sz="2000" b="1" i="0" dirty="0">
-                <a:solidFill>
-                  <a:srgbClr val="5C4826"/>
-                </a:solidFill>
-              </a:rPr>
-              <a:t xml:space="preserve">MODEL</a:t>
-            </a:r>
-          </a:p>
-        </p:txBody>
-      </p:sp>
-      <p:sp>
-        <p:nvSpPr>
-          <p:cNvPr id="105" name="Q0"/>
+              <a:t xml:space="preserve">EQUIP</a:t>
+            </a:r>
+          </a:p>
+        </p:txBody>
+      </p:sp>
+      <p:sp>
+        <p:nvSpPr>
+          <p:cNvPr id="111" name="Q1"/>
           <p:cNvSpPr txBox="1"/>
           <p:nvPr/>
         </p:nvSpPr>
         <p:spPr>
           <a:xfrm>
-            <a:off x="228600" y="1600200"/>
-            <a:ext cx="1920240" cy="685800"/>
+            <a:off x="3063240" y="2148840"/>
+            <a:ext cx="5715000" cy="411480"/>
           </a:xfrm>
           <a:prstGeom prst="rect">
             <a:avLst/>
@@ -19519,30 +19939,71 @@
           <a:bodyPr wrap="square" lIns="0" tIns="0" rIns="0" bIns="0" anchor="t"/>
           <a:lstStyle/>
           <a:p>
-            <a:pPr algn="ctr">
-              <a:buNone/>
-            </a:pPr>
-            <a:r>
-              <a:rPr lang="en-US" sz="2000" b="1" i="1" dirty="0">
+            <a:pPr algn="l">
+              <a:buNone/>
+            </a:pPr>
+            <a:r>
+              <a:rPr lang="en-US" sz="2000" b="0" i="1" dirty="0">
                 <a:solidFill>
                   <a:srgbClr val="8E6F3E"/>
                 </a:solidFill>
               </a:rPr>
-              <a:t xml:space="preserve">What capability?</a:t>
-            </a:r>
-          </a:p>
-        </p:txBody>
-      </p:sp>
-      <p:sp>
-        <p:nvSpPr>
-          <p:cNvPr id="106" name="Q1"/>
+              <a:t xml:space="preserve">What does the agent need to succeed?</a:t>
+            </a:r>
+          </a:p>
+        </p:txBody>
+      </p:sp>
+      <p:sp>
+        <p:nvSpPr>
+          <p:cNvPr id="102" name="M2"/>
+          <p:cNvSpPr/>
+          <p:nvPr/>
+        </p:nvSpPr>
+        <p:spPr>
+          <a:xfrm>
+            <a:off x="685800" y="2788920"/>
+            <a:ext cx="2103120" cy="640080"/>
+          </a:xfrm>
+          <a:prstGeom prst="rect">
+            <a:avLst/>
+          </a:prstGeom>
+          <a:solidFill>
+            <a:srgbClr val="F5F1E8"/>
+          </a:solidFill>
+          <a:ln w="12700">
+            <a:solidFill>
+              <a:srgbClr val="C9B991"/>
+            </a:solidFill>
+          </a:ln>
+        </p:spPr>
+        <p:txBody>
+          <a:bodyPr wrap="square" lIns="27432" tIns="22860" rIns="27432" bIns="22860" anchor="ctr"/>
+          <a:lstStyle/>
+          <a:p>
+            <a:pPr algn="ctr">
+              <a:buNone/>
+            </a:pPr>
+            <a:r>
+              <a:rPr lang="en-US" sz="2000" b="1" i="0" dirty="0">
+                <a:solidFill>
+                  <a:srgbClr val="5C4826"/>
+                </a:solidFill>
+              </a:rPr>
+              <a:t xml:space="preserve">AUTHORIZE</a:t>
+            </a:r>
+          </a:p>
+        </p:txBody>
+      </p:sp>
+      <p:sp>
+        <p:nvSpPr>
+          <p:cNvPr id="112" name="Q2"/>
           <p:cNvSpPr txBox="1"/>
           <p:nvPr/>
         </p:nvSpPr>
         <p:spPr>
           <a:xfrm>
-            <a:off x="6995160" y="1600200"/>
-            <a:ext cx="1920240" cy="685800"/>
+            <a:off x="3063240" y="2926080"/>
+            <a:ext cx="5715000" cy="411480"/>
           </a:xfrm>
           <a:prstGeom prst="rect">
             <a:avLst/>
@@ -19556,30 +20017,71 @@
           <a:bodyPr wrap="square" lIns="0" tIns="0" rIns="0" bIns="0" anchor="t"/>
           <a:lstStyle/>
           <a:p>
-            <a:pPr algn="ctr">
-              <a:buNone/>
-            </a:pPr>
-            <a:r>
-              <a:rPr lang="en-US" sz="2000" b="1" i="1" dirty="0">
+            <a:pPr algn="l">
+              <a:buNone/>
+            </a:pPr>
+            <a:r>
+              <a:rPr lang="en-US" sz="2000" b="0" i="1" dirty="0">
                 <a:solidFill>
                   <a:srgbClr val="8E6F3E"/>
                 </a:solidFill>
               </a:rPr>
-              <a:t xml:space="preserve">What leverage?</a:t>
-            </a:r>
-          </a:p>
-        </p:txBody>
-      </p:sp>
-      <p:sp>
-        <p:nvSpPr>
-          <p:cNvPr id="107" name="Q2"/>
+              <a:t xml:space="preserve">What consequences may it produce?</a:t>
+            </a:r>
+          </a:p>
+        </p:txBody>
+      </p:sp>
+      <p:sp>
+        <p:nvSpPr>
+          <p:cNvPr id="103" name="M3"/>
+          <p:cNvSpPr/>
+          <p:nvPr/>
+        </p:nvSpPr>
+        <p:spPr>
+          <a:xfrm>
+            <a:off x="685800" y="3566160"/>
+            <a:ext cx="2103120" cy="640080"/>
+          </a:xfrm>
+          <a:prstGeom prst="rect">
+            <a:avLst/>
+          </a:prstGeom>
+          <a:solidFill>
+            <a:srgbClr val="F5F1E8"/>
+          </a:solidFill>
+          <a:ln w="12700">
+            <a:solidFill>
+              <a:srgbClr val="C9B991"/>
+            </a:solidFill>
+          </a:ln>
+        </p:spPr>
+        <p:txBody>
+          <a:bodyPr wrap="square" lIns="27432" tIns="22860" rIns="27432" bIns="22860" anchor="ctr"/>
+          <a:lstStyle/>
+          <a:p>
+            <a:pPr algn="ctr">
+              <a:buNone/>
+            </a:pPr>
+            <a:r>
+              <a:rPr lang="en-US" sz="2000" b="1" i="0" dirty="0">
+                <a:solidFill>
+                  <a:srgbClr val="5C4826"/>
+                </a:solidFill>
+              </a:rPr>
+              <a:t xml:space="preserve">VERIFY</a:t>
+            </a:r>
+          </a:p>
+        </p:txBody>
+      </p:sp>
+      <p:sp>
+        <p:nvSpPr>
+          <p:cNvPr id="113" name="Q3"/>
           <p:cNvSpPr txBox="1"/>
           <p:nvPr/>
         </p:nvSpPr>
         <p:spPr>
           <a:xfrm>
-            <a:off x="228600" y="3931920"/>
-            <a:ext cx="1920240" cy="685800"/>
+            <a:off x="3063240" y="3703320"/>
+            <a:ext cx="5715000" cy="411480"/>
           </a:xfrm>
           <a:prstGeom prst="rect">
             <a:avLst/>
@@ -19593,30 +20095,30 @@
           <a:bodyPr wrap="square" lIns="0" tIns="0" rIns="0" bIns="0" anchor="t"/>
           <a:lstStyle/>
           <a:p>
-            <a:pPr algn="ctr">
-              <a:buNone/>
-            </a:pPr>
-            <a:r>
-              <a:rPr lang="en-US" sz="2000" b="1" i="1" dirty="0">
+            <a:pPr algn="l">
+              <a:buNone/>
+            </a:pPr>
+            <a:r>
+              <a:rPr lang="en-US" sz="2000" b="0" i="1" dirty="0">
                 <a:solidFill>
                   <a:srgbClr val="8E6F3E"/>
                 </a:solidFill>
               </a:rPr>
-              <a:t xml:space="preserve">What work?</a:t>
-            </a:r>
-          </a:p>
-        </p:txBody>
-      </p:sp>
-      <p:sp>
-        <p:nvSpPr>
-          <p:cNvPr id="108" name="Q3"/>
+              <a:t xml:space="preserve">What evidence closes the work?</a:t>
+            </a:r>
+          </a:p>
+        </p:txBody>
+      </p:sp>
+      <p:sp>
+        <p:nvSpPr>
+          <p:cNvPr id="120" name="Sub"/>
           <p:cNvSpPr txBox="1"/>
           <p:nvPr/>
         </p:nvSpPr>
         <p:spPr>
           <a:xfrm>
-            <a:off x="6995160" y="3931920"/>
-            <a:ext cx="1920240" cy="685800"/>
+            <a:off x="274320" y="4709160"/>
+            <a:ext cx="8595360" cy="457200"/>
           </a:xfrm>
           <a:prstGeom prst="rect">
             <a:avLst/>
@@ -19634,56 +20136,19 @@
               <a:buNone/>
             </a:pPr>
             <a:r>
-              <a:rPr lang="en-US" sz="2000" b="1" i="1" dirty="0">
-                <a:solidFill>
-                  <a:srgbClr val="8E6F3E"/>
-                </a:solidFill>
-              </a:rPr>
-              <a:t xml:space="preserve">What control?</a:t>
-            </a:r>
-          </a:p>
-        </p:txBody>
-      </p:sp>
-      <p:sp>
-        <p:nvSpPr>
-          <p:cNvPr id="109" name="Sub"/>
-          <p:cNvSpPr txBox="1"/>
-          <p:nvPr/>
-        </p:nvSpPr>
-        <p:spPr>
-          <a:xfrm>
-            <a:off x="274320" y="4709160"/>
-            <a:ext cx="8595360" cy="457200"/>
-          </a:xfrm>
-          <a:prstGeom prst="rect">
-            <a:avLst/>
-          </a:prstGeom>
-          <a:noFill/>
-          <a:ln>
-            <a:noFill/>
-          </a:ln>
-        </p:spPr>
-        <p:txBody>
-          <a:bodyPr wrap="square" lIns="0" tIns="0" rIns="0" bIns="0" anchor="t"/>
-          <a:lstStyle/>
-          <a:p>
-            <a:pPr algn="ctr">
-              <a:buNone/>
-            </a:pPr>
-            <a:r>
               <a:rPr lang="en-US" sz="2000" b="0" i="1" dirty="0">
                 <a:solidFill>
                   <a:srgbClr val="555960"/>
                 </a:solidFill>
               </a:rPr>
-              <a:t xml:space="preserve">capability · leverage · work · control — the four questions of the day</a:t>
-            </a:r>
-          </a:p>
-        </p:txBody>
-      </p:sp>
-      <p:sp>
-        <p:nvSpPr>
-          <p:cNvPr id="110" name="FooterBand"/>
+              <a:t xml:space="preserve">Four decisions, not a rigid pipeline — they interact.</a:t>
+            </a:r>
+          </a:p>
+        </p:txBody>
+      </p:sp>
+      <p:sp>
+        <p:nvSpPr>
+          <p:cNvPr id="121" name="FooterBand"/>
           <p:cNvSpPr/>
           <p:nvPr/>
         </p:nvSpPr>
@@ -19715,7 +20180,7 @@
                   <a:srgbClr val="FFFFFF"/>
                 </a:solidFill>
               </a:rPr>
-              <a:t xml:space="preserve">Everything today attaches to this picture.</a:t>
+              <a:t xml:space="preserve">Everything today answers one of these four questions.</a:t>
             </a:r>
           </a:p>
         </p:txBody>
@@ -19828,7 +20293,7 @@
                   <a:srgbClr val="8E6F3E"/>
                 </a:solidFill>
               </a:rPr>
-              <a:t>SECTION 5</a:t>
+              <a:t>AUTHORIZE</a:t>
             </a:r>
           </a:p>
         </p:txBody>
@@ -19850,7 +20315,7 @@
           <a:p>
             <a:fld id="{B7EB45DA-9A0D-DC49-8E02-F30A5DDC21C3}" type="slidenum">
               <a:rPr lang="en-US" smtClean="0"/>
-              <a:t>30</a:t>
+              <a:t>33</a:t>
             </a:fld>
             <a:endParaRPr lang="en-US"/>
           </a:p>
@@ -19964,7 +20429,7 @@
           <a:p>
             <a:fld id="{B7EB45DA-9A0D-DC49-8E02-F30A5DDC21C3}" type="slidenum">
               <a:rPr lang="en-US" smtClean="0"/>
-              <a:t>31</a:t>
+              <a:t>34</a:t>
             </a:fld>
             <a:endParaRPr lang="en-US"/>
           </a:p>
@@ -20527,7 +20992,7 @@
           <a:p>
             <a:fld id="{B7EB45DA-9A0D-DC49-8E02-F30A5DDC21C3}" type="slidenum">
               <a:rPr lang="en-US" smtClean="0"/>
-              <a:t>32</a:t>
+              <a:t>36</a:t>
             </a:fld>
             <a:endParaRPr lang="en-US"/>
           </a:p>
@@ -20927,7 +21392,7 @@
                   <a:srgbClr val="000000"/>
                 </a:solidFill>
               </a:rPr>
-              <a:t>Authority can act at different grains</a:t>
+              <a:t>Obligations can act at different grains</a:t>
             </a:r>
           </a:p>
         </p:txBody>
@@ -20949,7 +21414,7 @@
           <a:p>
             <a:fld id="{B7EB45DA-9A0D-DC49-8E02-F30A5DDC21C3}" type="slidenum">
               <a:rPr lang="en-US" smtClean="0"/>
-              <a:t>33</a:t>
+              <a:t>37</a:t>
             </a:fld>
             <a:endParaRPr lang="en-US"/>
           </a:p>
@@ -20991,7 +21456,7 @@
                   <a:srgbClr val="5C4826"/>
                 </a:solidFill>
               </a:rPr>
-              <a:t xml:space="preserve">REASONING INPUT</a:t>
+              <a:t xml:space="preserve">GUIDANCE</a:t>
             </a:r>
           </a:p>
         </p:txBody>
@@ -21073,7 +21538,7 @@
                   <a:srgbClr val="5C4826"/>
                 </a:solidFill>
               </a:rPr>
-              <a:t xml:space="preserve">ACTION</a:t>
+              <a:t xml:space="preserve">ACTION AUTHORITY</a:t>
             </a:r>
           </a:p>
         </p:txBody>
@@ -21155,7 +21620,7 @@
                   <a:srgbClr val="5C4826"/>
                 </a:solidFill>
               </a:rPr>
-              <a:t xml:space="preserve">WORK UNIT</a:t>
+              <a:t xml:space="preserve">ADMISSION</a:t>
             </a:r>
           </a:p>
         </p:txBody>
@@ -21237,7 +21702,7 @@
                   <a:srgbClr val="5C4826"/>
                 </a:solidFill>
               </a:rPr>
-              <a:t xml:space="preserve">ARTIFACT / RUNTIME</a:t>
+              <a:t xml:space="preserve">RUNTIME CONTROL</a:t>
             </a:r>
           </a:p>
         </p:txBody>
@@ -21497,7 +21962,7 @@
           <a:p>
             <a:fld id="{B7EB45DA-9A0D-DC49-8E02-F30A5DDC21C3}" type="slidenum">
               <a:rPr lang="en-US" smtClean="0"/>
-              <a:t>34</a:t>
+              <a:t>40</a:t>
             </a:fld>
             <a:endParaRPr lang="en-US"/>
           </a:p>
@@ -21535,7 +22000,7 @@
                   <a:srgbClr val="8E6F3E"/>
                 </a:solidFill>
               </a:rPr>
-              <a:t xml:space="preserve">Engineer the system, not merely the prompt.</a:t>
+              <a:t xml:space="preserve">Engineering delegation</a:t>
             </a:r>
           </a:p>
         </p:txBody>
@@ -21576,7 +22041,7 @@
                   <a:srgbClr val="5C4826"/>
                 </a:solidFill>
               </a:rPr>
-              <a:t xml:space="preserve">MODEL</a:t>
+              <a:t xml:space="preserve">BOUND</a:t>
             </a:r>
           </a:p>
         </p:txBody>
@@ -21639,7 +22104,7 @@
                   <a:srgbClr val="5C4826"/>
                 </a:solidFill>
               </a:rPr>
-              <a:t xml:space="preserve">HARNESS</a:t>
+              <a:t xml:space="preserve">EQUIP</a:t>
             </a:r>
           </a:p>
         </p:txBody>
@@ -21702,7 +22167,7 @@
                   <a:srgbClr val="5C4826"/>
                 </a:solidFill>
               </a:rPr>
-              <a:t xml:space="preserve">ENVIRONMENT</a:t>
+              <a:t xml:space="preserve">AUTHORIZE</a:t>
             </a:r>
           </a:p>
         </p:txBody>
@@ -21765,7 +22230,7 @@
                   <a:srgbClr val="5C4826"/>
                 </a:solidFill>
               </a:rPr>
-              <a:t xml:space="preserve">WORK</a:t>
+              <a:t xml:space="preserve">VERIFY</a:t>
             </a:r>
           </a:p>
         </p:txBody>
@@ -21778,8 +22243,8 @@
         </p:nvSpPr>
         <p:spPr>
           <a:xfrm>
-            <a:off x="365760" y="2286000"/>
-            <a:ext cx="8412480" cy="1097280"/>
+            <a:off x="274320" y="2222500"/>
+            <a:ext cx="8595360" cy="1250000"/>
           </a:xfrm>
           <a:prstGeom prst="rect">
             <a:avLst/>
@@ -21802,7 +22267,7 @@
                   <a:srgbClr val="555960"/>
                 </a:solidFill>
               </a:rPr>
-              <a:t xml:space="preserve">Agents make realization cheaper and faster.</a:t>
+              <a:t xml:space="preserve">Bound the work so it presents a tractable reasoning problem.</a:t>
             </a:r>
           </a:p>
           <a:p>
@@ -21818,11 +22283,14 @@
                   <a:srgbClr val="555960"/>
                 </a:solidFill>
               </a:rPr>
-              <a:t xml:space="preserve">Engineering determines what should be realized, what must remain true,</a:t>
-            </a:r>
-          </a:p>
-          <a:p>
-            <a:pPr algn="ctr">
+              <a:t xml:space="preserve">Equip the agent with sufficient capability and reasoning surfaces.</a:t>
+            </a:r>
+          </a:p>
+          <a:p>
+            <a:pPr algn="ctr">
+              <a:spcBef>
+                <a:spcPts val="120"/>
+              </a:spcBef>
               <a:buNone/>
             </a:pPr>
             <a:r>
@@ -21831,7 +22299,23 @@
                   <a:srgbClr val="555960"/>
                 </a:solidFill>
               </a:rPr>
-              <a:t xml:space="preserve">and what evidence is sufficient.</a:t>
+              <a:t xml:space="preserve">Authorize only the consequences it should be permitted to produce.</a:t>
+            </a:r>
+          </a:p>
+          <a:p>
+            <a:pPr algn="ctr">
+              <a:spcBef>
+                <a:spcPts val="120"/>
+              </a:spcBef>
+              <a:buNone/>
+            </a:pPr>
+            <a:r>
+              <a:rPr lang="en-US" sz="2000" b="0" i="0" dirty="0">
+                <a:solidFill>
+                  <a:srgbClr val="555960"/>
+                </a:solidFill>
+              </a:rPr>
+              <a:t xml:space="preserve">Verify the claims necessary to accept the work.</a:t>
             </a:r>
           </a:p>
         </p:txBody>
@@ -22183,6 +22667,2093 @@
                 </a:solidFill>
               </a:rPr>
               <a:t xml:space="preserve">Delegate realization — without delegating engineering.</a:t>
+            </a:r>
+          </a:p>
+        </p:txBody>
+      </p:sp>
+    </p:spTree>
+  </p:cSld>
+  <p:clrMapOvr>
+    <a:masterClrMapping/>
+  </p:clrMapOvr>
+</p:sld>
+</file>
+
+<file path=ppt/slides/slide35.xml><?xml version="1.0" encoding="utf-8"?>
+<p:sld xmlns:a="http://schemas.openxmlformats.org/drawingml/2006/main" xmlns:r="http://schemas.openxmlformats.org/officeDocument/2006/relationships" xmlns:p="http://schemas.openxmlformats.org/presentationml/2006/main">
+  <p:cSld>
+    <p:spTree>
+      <p:nvGrpSpPr>
+        <p:cNvPr id="1" name=""/>
+        <p:cNvGrpSpPr/>
+        <p:nvPr/>
+      </p:nvGrpSpPr>
+      <p:grpSpPr>
+        <a:xfrm>
+          <a:off x="0" y="0"/>
+          <a:ext cx="0" cy="0"/>
+          <a:chOff x="0" y="0"/>
+          <a:chExt cx="0" cy="0"/>
+        </a:xfrm>
+      </p:grpSpPr>
+      <p:sp>
+        <p:nvSpPr>
+          <p:cNvPr id="3" name="Slide Number Placeholder 3"/>
+          <p:cNvSpPr>
+            <a:spLocks noGrp="1"/>
+          </p:cNvSpPr>
+          <p:nvPr>
+            <p:ph type="sldNum" sz="quarter" idx="4"/>
+          </p:nvPr>
+        </p:nvSpPr>
+        <p:spPr/>
+        <p:txBody>
+          <a:bodyPr/>
+          <a:lstStyle/>
+          <a:p>
+            <a:fld id="{B7EB45DA-9A0D-DC49-8E02-F30A5DDC21C3}" type="slidenum">
+              <a:rPr lang="en-US" smtClean="0"/>
+              <a:t>2</a:t>
+            </a:fld>
+            <a:endParaRPr lang="en-US"/>
+          </a:p>
+        </p:txBody>
+      </p:sp>
+      <p:sp>
+        <p:nvSpPr>
+          <p:cNvPr id="90" name="SectionLabel"/>
+          <p:cNvSpPr txBox="1"/>
+          <p:nvPr/>
+        </p:nvSpPr>
+        <p:spPr>
+          <a:xfrm>
+            <a:off x="685800" y="1554480"/>
+            <a:ext cx="7772400" cy="356616"/>
+          </a:xfrm>
+          <a:prstGeom prst="rect">
+            <a:avLst/>
+          </a:prstGeom>
+          <a:noFill/>
+          <a:ln>
+            <a:noFill/>
+          </a:ln>
+        </p:spPr>
+        <p:txBody>
+          <a:bodyPr wrap="square" lIns="0" tIns="0" rIns="0" bIns="0" anchor="t"/>
+          <a:lstStyle/>
+          <a:p>
+            <a:pPr algn="ctr">
+              <a:buNone/>
+            </a:pPr>
+            <a:r>
+              <a:rPr lang="en-US" sz="2200" b="1" i="0" dirty="0">
+                <a:solidFill>
+                  <a:srgbClr val="8E6F3E"/>
+                </a:solidFill>
+              </a:rPr>
+              <a:t xml:space="preserve">ENGINEERING</a:t>
+            </a:r>
+          </a:p>
+        </p:txBody>
+      </p:sp>
+      <p:sp>
+        <p:nvSpPr>
+          <p:cNvPr id="2" name="Title 1"/>
+          <p:cNvSpPr>
+            <a:spLocks noGrp="1"/>
+          </p:cNvSpPr>
+          <p:nvPr>
+            <p:ph type="title"/>
+          </p:nvPr>
+        </p:nvSpPr>
+        <p:spPr>
+          <a:xfrm>
+            <a:off x="685800" y="2057400"/>
+            <a:ext cx="7772400" cy="1371600"/>
+          </a:xfrm>
+        </p:spPr>
+        <p:txBody>
+          <a:bodyPr>
+            <a:normAutofit/>
+          </a:bodyPr>
+          <a:lstStyle/>
+          <a:p>
+            <a:pPr algn="ctr">
+              <a:buNone/>
+              <a:defRPr b="0"/>
+            </a:pPr>
+            <a:r>
+              <a:rPr lang="en-US" sz="2400" b="0" i="0" dirty="0">
+                <a:solidFill>
+                  <a:srgbClr val="000000"/>
+                </a:solidFill>
+              </a:rPr>
+              <a:t xml:space="preserve">Engineers may delegate realization</a:t>
+            </a:r>
+          </a:p>
+          <a:p>
+            <a:pPr algn="ctr">
+              <a:buNone/>
+              <a:defRPr b="0"/>
+            </a:pPr>
+            <a:r>
+              <a:rPr lang="en-US" sz="2400" b="0" i="0" dirty="0">
+                <a:solidFill>
+                  <a:srgbClr val="000000"/>
+                </a:solidFill>
+              </a:rPr>
+              <a:t xml:space="preserve">without delegating responsibility</a:t>
+            </a:r>
+          </a:p>
+          <a:p>
+            <a:pPr algn="ctr">
+              <a:buNone/>
+              <a:defRPr b="0"/>
+            </a:pPr>
+            <a:r>
+              <a:rPr lang="en-US" sz="2400" b="0" i="0" dirty="0">
+                <a:solidFill>
+                  <a:srgbClr val="000000"/>
+                </a:solidFill>
+              </a:rPr>
+              <a:t xml:space="preserve">for the resulting system.</a:t>
+            </a:r>
+          </a:p>
+        </p:txBody>
+      </p:sp>
+      <p:sp>
+        <p:nvSpPr>
+          <p:cNvPr id="91" name="Rule"/>
+          <p:cNvSpPr/>
+          <p:nvPr/>
+        </p:nvSpPr>
+        <p:spPr>
+          <a:xfrm>
+            <a:off x="3429000" y="3703320"/>
+            <a:ext cx="2286000" cy="51206"/>
+          </a:xfrm>
+          <a:prstGeom prst="rect">
+            <a:avLst/>
+          </a:prstGeom>
+          <a:solidFill>
+            <a:srgbClr val="8E6F3E"/>
+          </a:solidFill>
+          <a:ln w="12700">
+            <a:solidFill>
+              <a:srgbClr val="8E6F3E"/>
+            </a:solidFill>
+          </a:ln>
+        </p:spPr>
+        <p:txBody>
+          <a:bodyPr wrap="square" lIns="27432" tIns="22860" rIns="27432" bIns="22860" anchor="ctr"/>
+          <a:lstStyle/>
+          <a:p>
+            <a:endParaRPr/>
+          </a:p>
+        </p:txBody>
+      </p:sp>
+      <p:sp>
+        <p:nvSpPr>
+          <p:cNvPr id="92" name="Transition"/>
+          <p:cNvSpPr txBox="1"/>
+          <p:nvPr/>
+        </p:nvSpPr>
+        <p:spPr>
+          <a:xfrm>
+            <a:off x="274320" y="4114800"/>
+            <a:ext cx="8595360" cy="411480"/>
+          </a:xfrm>
+          <a:prstGeom prst="rect">
+            <a:avLst/>
+          </a:prstGeom>
+          <a:noFill/>
+          <a:ln>
+            <a:noFill/>
+          </a:ln>
+        </p:spPr>
+        <p:txBody>
+          <a:bodyPr wrap="square" lIns="0" tIns="0" rIns="0" bIns="0" anchor="t"/>
+          <a:lstStyle/>
+          <a:p>
+            <a:pPr algn="ctr">
+              <a:buNone/>
+            </a:pPr>
+            <a:r>
+              <a:rPr lang="en-US" sz="2000" b="0" i="1" dirty="0">
+                <a:solidFill>
+                  <a:srgbClr val="555960"/>
+                </a:solidFill>
+              </a:rPr>
+              <a:t xml:space="preserve">So delegation itself must be engineered.</a:t>
+            </a:r>
+          </a:p>
+        </p:txBody>
+      </p:sp>
+      <p:sp>
+        <p:nvSpPr>
+          <p:cNvPr id="93" name="Chain"/>
+          <p:cNvSpPr txBox="1"/>
+          <p:nvPr/>
+        </p:nvSpPr>
+        <p:spPr>
+          <a:xfrm>
+            <a:off x="274320" y="4754880"/>
+            <a:ext cx="8595360" cy="457200"/>
+          </a:xfrm>
+          <a:prstGeom prst="rect">
+            <a:avLst/>
+          </a:prstGeom>
+          <a:noFill/>
+          <a:ln>
+            <a:noFill/>
+          </a:ln>
+        </p:spPr>
+        <p:txBody>
+          <a:bodyPr wrap="square" lIns="0" tIns="0" rIns="0" bIns="0" anchor="t"/>
+          <a:lstStyle/>
+          <a:p>
+            <a:pPr algn="ctr">
+              <a:buNone/>
+            </a:pPr>
+            <a:r>
+              <a:rPr lang="en-US" sz="2400" b="1" i="0" dirty="0">
+                <a:solidFill>
+                  <a:srgbClr val="8E6F3E"/>
+                </a:solidFill>
+              </a:rPr>
+              <a:t xml:space="preserve">BOUND → EQUIP → AUTHORIZE → VERIFY</a:t>
+            </a:r>
+          </a:p>
+        </p:txBody>
+      </p:sp>
+    </p:spTree>
+  </p:cSld>
+  <p:clrMapOvr>
+    <a:masterClrMapping/>
+  </p:clrMapOvr>
+</p:sld>
+</file>
+
+<file path=ppt/slides/slide36.xml><?xml version="1.0" encoding="utf-8"?>
+<p:sld xmlns:a="http://schemas.openxmlformats.org/drawingml/2006/main" xmlns:r="http://schemas.openxmlformats.org/officeDocument/2006/relationships" xmlns:p="http://schemas.openxmlformats.org/presentationml/2006/main">
+  <p:cSld>
+    <p:spTree>
+      <p:nvGrpSpPr>
+        <p:cNvPr id="1" name=""/>
+        <p:cNvGrpSpPr/>
+        <p:nvPr/>
+      </p:nvGrpSpPr>
+      <p:grpSpPr>
+        <a:xfrm>
+          <a:off x="0" y="0"/>
+          <a:ext cx="0" cy="0"/>
+          <a:chOff x="0" y="0"/>
+          <a:chExt cx="0" cy="0"/>
+        </a:xfrm>
+      </p:grpSpPr>
+      <p:sp>
+        <p:nvSpPr>
+          <p:cNvPr id="2" name="Title 1"/>
+          <p:cNvSpPr>
+            <a:spLocks noGrp="1"/>
+          </p:cNvSpPr>
+          <p:nvPr>
+            <p:ph type="title"/>
+          </p:nvPr>
+        </p:nvSpPr>
+        <p:spPr>
+          <a:xfrm>
+            <a:off x="277148" y="118428"/>
+            <a:ext cx="8590000" cy="638175"/>
+          </a:xfrm>
+        </p:spPr>
+        <p:txBody>
+          <a:bodyPr>
+            <a:normAutofit/>
+          </a:bodyPr>
+          <a:lstStyle/>
+          <a:p>
+            <a:pPr>
+              <a:buNone/>
+              <a:defRPr b="0"/>
+            </a:pPr>
+            <a:r>
+              <a:rPr lang="en-US" sz="2400" b="0" i="0" dirty="0">
+                <a:solidFill>
+                  <a:srgbClr val="000000"/>
+                </a:solidFill>
+              </a:rPr>
+              <a:t>BOUND: design the delegated work</a:t>
+            </a:r>
+          </a:p>
+        </p:txBody>
+      </p:sp>
+      <p:sp>
+        <p:nvSpPr>
+          <p:cNvPr id="3" name="Slide Number Placeholder 3"/>
+          <p:cNvSpPr>
+            <a:spLocks noGrp="1"/>
+          </p:cNvSpPr>
+          <p:nvPr>
+            <p:ph type="sldNum" sz="quarter" idx="4"/>
+          </p:nvPr>
+        </p:nvSpPr>
+        <p:spPr/>
+        <p:txBody>
+          <a:bodyPr/>
+          <a:lstStyle/>
+          <a:p>
+            <a:fld id="{B7EB45DA-9A0D-DC49-8E02-F30A5DDC21C3}" type="slidenum">
+              <a:rPr lang="en-US" smtClean="0"/>
+              <a:t>4</a:t>
+            </a:fld>
+            <a:endParaRPr lang="en-US"/>
+          </a:p>
+        </p:txBody>
+      </p:sp>
+      <p:sp>
+        <p:nvSpPr>
+          <p:cNvPr id="100" name="BigTask"/>
+          <p:cNvSpPr/>
+          <p:nvPr/>
+        </p:nvSpPr>
+        <p:spPr>
+          <a:xfrm>
+            <a:off x="685800" y="1600200"/>
+            <a:ext cx="2103120" cy="1828800"/>
+          </a:xfrm>
+          <a:prstGeom prst="rect">
+            <a:avLst/>
+          </a:prstGeom>
+          <a:solidFill>
+            <a:srgbClr val="F5F1E8"/>
+          </a:solidFill>
+          <a:ln w="12700">
+            <a:solidFill>
+              <a:srgbClr val="C9B991"/>
+            </a:solidFill>
+          </a:ln>
+        </p:spPr>
+        <p:txBody>
+          <a:bodyPr wrap="square" lIns="27432" tIns="22860" rIns="27432" bIns="22860" anchor="ctr"/>
+          <a:lstStyle/>
+          <a:p>
+            <a:pPr algn="ctr">
+              <a:buNone/>
+            </a:pPr>
+            <a:r>
+              <a:rPr lang="en-US" sz="2000" b="1" i="0" dirty="0">
+                <a:solidFill>
+                  <a:srgbClr val="5C4826"/>
+                </a:solidFill>
+              </a:rPr>
+              <a:t xml:space="preserve">ONE LARGE TASK</a:t>
+            </a:r>
+          </a:p>
+          <a:p>
+            <a:pPr algn="ctr">
+              <a:spcBef>
+                <a:spcPts val="200"/>
+              </a:spcBef>
+              <a:buNone/>
+            </a:pPr>
+            <a:r>
+              <a:rPr lang="en-US" sz="2000" b="0" i="0" dirty="0">
+                <a:solidFill>
+                  <a:srgbClr val="555960"/>
+                </a:solidFill>
+              </a:rPr>
+              <a:t xml:space="preserve">more relevant state than one reasoning episode can hold</a:t>
+            </a:r>
+          </a:p>
+        </p:txBody>
+      </p:sp>
+      <p:cxnSp>
+        <p:nvCxnSpPr>
+          <p:cNvPr id="101" name="A0"/>
+          <p:cNvCxnSpPr/>
+          <p:nvPr/>
+        </p:nvCxnSpPr>
+        <p:spPr>
+          <a:xfrm>
+            <a:off x="2925024" y="2514600"/>
+            <a:ext cx="457200" cy="0"/>
+          </a:xfrm>
+          <a:prstGeom prst="straightConnector1">
+            <a:avLst/>
+          </a:prstGeom>
+          <a:ln w="28575">
+            <a:solidFill>
+              <a:srgbClr val="8E6F3E"/>
+            </a:solidFill>
+            <a:tailEnd type="triangle" w="med" len="med"/>
+          </a:ln>
+        </p:spPr>
+      </p:cxnSp>
+      <p:sp>
+        <p:nvSpPr>
+          <p:cNvPr id="102" name="WU0"/>
+          <p:cNvSpPr/>
+          <p:nvPr/>
+        </p:nvSpPr>
+        <p:spPr>
+          <a:xfrm>
+            <a:off x="3520440" y="1600200"/>
+            <a:ext cx="2011680" cy="548640"/>
+          </a:xfrm>
+          <a:prstGeom prst="rect">
+            <a:avLst/>
+          </a:prstGeom>
+          <a:solidFill>
+            <a:srgbClr val="F5F1E8"/>
+          </a:solidFill>
+          <a:ln w="12700">
+            <a:solidFill>
+              <a:srgbClr val="C9B991"/>
+            </a:solidFill>
+          </a:ln>
+        </p:spPr>
+        <p:txBody>
+          <a:bodyPr wrap="square" lIns="27432" tIns="22860" rIns="27432" bIns="22860" anchor="ctr"/>
+          <a:lstStyle/>
+          <a:p>
+            <a:pPr algn="ctr">
+              <a:buNone/>
+            </a:pPr>
+            <a:r>
+              <a:rPr lang="en-US" sz="2000" b="1" i="0" dirty="0">
+                <a:solidFill>
+                  <a:srgbClr val="5C4826"/>
+                </a:solidFill>
+              </a:rPr>
+              <a:t xml:space="preserve">WORK UNIT</a:t>
+            </a:r>
+          </a:p>
+        </p:txBody>
+      </p:sp>
+      <p:sp>
+        <p:nvSpPr>
+          <p:cNvPr id="103" name="WU1"/>
+          <p:cNvSpPr/>
+          <p:nvPr/>
+        </p:nvSpPr>
+        <p:spPr>
+          <a:xfrm>
+            <a:off x="3520440" y="2240280"/>
+            <a:ext cx="2011680" cy="548640"/>
+          </a:xfrm>
+          <a:prstGeom prst="rect">
+            <a:avLst/>
+          </a:prstGeom>
+          <a:solidFill>
+            <a:srgbClr val="F5F1E8"/>
+          </a:solidFill>
+          <a:ln w="12700">
+            <a:solidFill>
+              <a:srgbClr val="C9B991"/>
+            </a:solidFill>
+          </a:ln>
+        </p:spPr>
+        <p:txBody>
+          <a:bodyPr wrap="square" lIns="27432" tIns="22860" rIns="27432" bIns="22860" anchor="ctr"/>
+          <a:lstStyle/>
+          <a:p>
+            <a:pPr algn="ctr">
+              <a:buNone/>
+            </a:pPr>
+            <a:r>
+              <a:rPr lang="en-US" sz="2000" b="1" i="0" dirty="0">
+                <a:solidFill>
+                  <a:srgbClr val="5C4826"/>
+                </a:solidFill>
+              </a:rPr>
+              <a:t xml:space="preserve">WORK UNIT</a:t>
+            </a:r>
+          </a:p>
+        </p:txBody>
+      </p:sp>
+      <p:sp>
+        <p:nvSpPr>
+          <p:cNvPr id="104" name="WU2"/>
+          <p:cNvSpPr/>
+          <p:nvPr/>
+        </p:nvSpPr>
+        <p:spPr>
+          <a:xfrm>
+            <a:off x="3520440" y="2880360"/>
+            <a:ext cx="2011680" cy="548640"/>
+          </a:xfrm>
+          <a:prstGeom prst="rect">
+            <a:avLst/>
+          </a:prstGeom>
+          <a:solidFill>
+            <a:srgbClr val="F5F1E8"/>
+          </a:solidFill>
+          <a:ln w="12700">
+            <a:solidFill>
+              <a:srgbClr val="C9B991"/>
+            </a:solidFill>
+          </a:ln>
+        </p:spPr>
+        <p:txBody>
+          <a:bodyPr wrap="square" lIns="27432" tIns="22860" rIns="27432" bIns="22860" anchor="ctr"/>
+          <a:lstStyle/>
+          <a:p>
+            <a:pPr algn="ctr">
+              <a:buNone/>
+            </a:pPr>
+            <a:r>
+              <a:rPr lang="en-US" sz="2000" b="1" i="0" dirty="0">
+                <a:solidFill>
+                  <a:srgbClr val="5C4826"/>
+                </a:solidFill>
+              </a:rPr>
+              <a:t xml:space="preserve">WORK UNIT</a:t>
+            </a:r>
+          </a:p>
+        </p:txBody>
+      </p:sp>
+      <p:sp>
+        <p:nvSpPr>
+          <p:cNvPr id="105" name="Glue"/>
+          <p:cNvSpPr txBox="1"/>
+          <p:nvPr/>
+        </p:nvSpPr>
+        <p:spPr>
+          <a:xfrm>
+            <a:off x="5760720" y="1600200"/>
+            <a:ext cx="3108960" cy="1828800"/>
+          </a:xfrm>
+          <a:prstGeom prst="rect">
+            <a:avLst/>
+          </a:prstGeom>
+          <a:noFill/>
+          <a:ln>
+            <a:noFill/>
+          </a:ln>
+        </p:spPr>
+        <p:txBody>
+          <a:bodyPr wrap="square" lIns="0" tIns="0" rIns="0" bIns="0" anchor="t"/>
+          <a:lstStyle/>
+          <a:p>
+            <a:pPr algn="ctr">
+              <a:buNone/>
+            </a:pPr>
+            <a:r>
+              <a:rPr lang="en-US" sz="2000" b="0" i="0" dirty="0">
+                <a:solidFill>
+                  <a:srgbClr val="555960"/>
+                </a:solidFill>
+              </a:rPr>
+              <a:t xml:space="preserve">explicit intermediate artifacts</a:t>
+            </a:r>
+          </a:p>
+          <a:p>
+            <a:pPr algn="ctr">
+              <a:spcBef>
+                <a:spcPts val="300"/>
+              </a:spcBef>
+              <a:buNone/>
+            </a:pPr>
+            <a:r>
+              <a:rPr lang="en-US" sz="2000" b="0" i="0" dirty="0">
+                <a:solidFill>
+                  <a:srgbClr val="555960"/>
+                </a:solidFill>
+              </a:rPr>
+              <a:t xml:space="preserve">checkpoints between stages</a:t>
+            </a:r>
+          </a:p>
+          <a:p>
+            <a:pPr algn="ctr">
+              <a:spcBef>
+                <a:spcPts val="300"/>
+              </a:spcBef>
+              <a:buNone/>
+            </a:pPr>
+            <a:r>
+              <a:rPr lang="en-US" sz="2000" b="0" i="0" dirty="0">
+                <a:solidFill>
+                  <a:srgbClr val="555960"/>
+                </a:solidFill>
+              </a:rPr>
+              <a:t xml:space="preserve">boundaries that limit state</a:t>
+            </a:r>
+          </a:p>
+        </p:txBody>
+      </p:sp>
+      <p:sp>
+        <p:nvSpPr>
+          <p:cNvPr id="106" name="Tradeoff"/>
+          <p:cNvSpPr txBox="1"/>
+          <p:nvPr/>
+        </p:nvSpPr>
+        <p:spPr>
+          <a:xfrm>
+            <a:off x="274320" y="4160520"/>
+            <a:ext cx="8595360" cy="1005840"/>
+          </a:xfrm>
+          <a:prstGeom prst="rect">
+            <a:avLst/>
+          </a:prstGeom>
+          <a:noFill/>
+          <a:ln>
+            <a:noFill/>
+          </a:ln>
+        </p:spPr>
+        <p:txBody>
+          <a:bodyPr wrap="square" lIns="0" tIns="0" rIns="0" bIns="0" anchor="t"/>
+          <a:lstStyle/>
+          <a:p>
+            <a:pPr algn="ctr">
+              <a:buNone/>
+            </a:pPr>
+            <a:r>
+              <a:rPr lang="en-US" sz="2000" b="0" i="0" dirty="0">
+                <a:solidFill>
+                  <a:srgbClr val="555960"/>
+                </a:solidFill>
+              </a:rPr>
+              <a:t xml:space="preserve">Too broad → relevant state exceeds the reasoning horizon.</a:t>
+            </a:r>
+          </a:p>
+          <a:p>
+            <a:pPr algn="ctr">
+              <a:spcBef>
+                <a:spcPts val="200"/>
+              </a:spcBef>
+              <a:buNone/>
+            </a:pPr>
+            <a:r>
+              <a:rPr lang="en-US" sz="2000" b="0" i="0" dirty="0">
+                <a:solidFill>
+                  <a:srgbClr val="555960"/>
+                </a:solidFill>
+              </a:rPr>
+              <a:t xml:space="preserve">Too fragmented → context must constantly cross boundaries.</a:t>
+            </a:r>
+          </a:p>
+        </p:txBody>
+      </p:sp>
+      <p:sp>
+        <p:nvSpPr>
+          <p:cNvPr id="107" name="FooterBand"/>
+          <p:cNvSpPr/>
+          <p:nvPr/>
+        </p:nvSpPr>
+        <p:spPr>
+          <a:xfrm>
+            <a:off x="274320" y="5852160"/>
+            <a:ext cx="8595360" cy="566928"/>
+          </a:xfrm>
+          <a:prstGeom prst="rect">
+            <a:avLst/>
+          </a:prstGeom>
+          <a:solidFill>
+            <a:srgbClr val="8E6F3E"/>
+          </a:solidFill>
+          <a:ln>
+            <a:noFill/>
+          </a:ln>
+        </p:spPr>
+        <p:txBody>
+          <a:bodyPr wrap="square" lIns="91440" tIns="45720" rIns="91440" bIns="45720" anchor="ctr"/>
+          <a:lstStyle/>
+          <a:p>
+            <a:pPr algn="ctr">
+              <a:buNone/>
+            </a:pPr>
+            <a:r>
+              <a:rPr lang="en-US" sz="2000" b="1" i="0" dirty="0">
+                <a:solidFill>
+                  <a:srgbClr val="FFFFFF"/>
+                </a:solidFill>
+              </a:rPr>
+              <a:t xml:space="preserve">Change the task to change the reasoning problem.</a:t>
+            </a:r>
+          </a:p>
+        </p:txBody>
+      </p:sp>
+    </p:spTree>
+  </p:cSld>
+  <p:clrMapOvr>
+    <a:masterClrMapping/>
+  </p:clrMapOvr>
+</p:sld>
+</file>
+
+<file path=ppt/slides/slide37.xml><?xml version="1.0" encoding="utf-8"?>
+<p:sld xmlns:a="http://schemas.openxmlformats.org/drawingml/2006/main" xmlns:r="http://schemas.openxmlformats.org/officeDocument/2006/relationships" xmlns:p="http://schemas.openxmlformats.org/presentationml/2006/main">
+  <p:cSld>
+    <p:spTree>
+      <p:nvGrpSpPr>
+        <p:cNvPr id="1" name=""/>
+        <p:cNvGrpSpPr/>
+        <p:nvPr/>
+      </p:nvGrpSpPr>
+      <p:grpSpPr>
+        <a:xfrm>
+          <a:off x="0" y="0"/>
+          <a:ext cx="0" cy="0"/>
+          <a:chOff x="0" y="0"/>
+          <a:chExt cx="0" cy="0"/>
+        </a:xfrm>
+      </p:grpSpPr>
+      <p:sp>
+        <p:nvSpPr>
+          <p:cNvPr id="2" name="Title 1"/>
+          <p:cNvSpPr>
+            <a:spLocks noGrp="1"/>
+          </p:cNvSpPr>
+          <p:nvPr>
+            <p:ph type="title"/>
+          </p:nvPr>
+        </p:nvSpPr>
+        <p:spPr>
+          <a:xfrm>
+            <a:off x="277148" y="118428"/>
+            <a:ext cx="8590000" cy="638175"/>
+          </a:xfrm>
+        </p:spPr>
+        <p:txBody>
+          <a:bodyPr>
+            <a:normAutofit/>
+          </a:bodyPr>
+          <a:lstStyle/>
+          <a:p>
+            <a:pPr>
+              <a:buNone/>
+              <a:defRPr b="0"/>
+            </a:pPr>
+            <a:r>
+              <a:rPr lang="en-US" sz="2400" b="0" i="0" dirty="0">
+                <a:solidFill>
+                  <a:srgbClr val="000000"/>
+                </a:solidFill>
+              </a:rPr>
+              <a:t>A delegation boundary is a reasoning boundary</a:t>
+            </a:r>
+          </a:p>
+        </p:txBody>
+      </p:sp>
+      <p:sp>
+        <p:nvSpPr>
+          <p:cNvPr id="3" name="Slide Number Placeholder 3"/>
+          <p:cNvSpPr>
+            <a:spLocks noGrp="1"/>
+          </p:cNvSpPr>
+          <p:nvPr>
+            <p:ph type="sldNum" sz="quarter" idx="4"/>
+          </p:nvPr>
+        </p:nvSpPr>
+        <p:spPr/>
+        <p:txBody>
+          <a:bodyPr/>
+          <a:lstStyle/>
+          <a:p>
+            <a:fld id="{B7EB45DA-9A0D-DC49-8E02-F30A5DDC21C3}" type="slidenum">
+              <a:rPr lang="en-US" smtClean="0"/>
+              <a:t>5</a:t>
+            </a:fld>
+            <a:endParaRPr lang="en-US"/>
+          </a:p>
+        </p:txBody>
+      </p:sp>
+      <p:sp>
+        <p:nvSpPr>
+          <p:cNvPr id="100" name="Question"/>
+          <p:cNvSpPr txBox="1"/>
+          <p:nvPr/>
+        </p:nvSpPr>
+        <p:spPr>
+          <a:xfrm>
+            <a:off x="274320" y="1600200"/>
+            <a:ext cx="8595360" cy="1371600"/>
+          </a:xfrm>
+          <a:prstGeom prst="rect">
+            <a:avLst/>
+          </a:prstGeom>
+          <a:noFill/>
+          <a:ln>
+            <a:noFill/>
+          </a:ln>
+        </p:spPr>
+        <p:txBody>
+          <a:bodyPr wrap="square" lIns="0" tIns="0" rIns="0" bIns="0" anchor="t"/>
+          <a:lstStyle/>
+          <a:p>
+            <a:pPr algn="ctr">
+              <a:buNone/>
+            </a:pPr>
+            <a:r>
+              <a:rPr lang="en-US" sz="2400" b="0" i="1" dirty="0">
+                <a:solidFill>
+                  <a:srgbClr val="000000"/>
+                </a:solidFill>
+              </a:rPr>
+              <a:t xml:space="preserve">The question is not how small the task can be —</a:t>
+            </a:r>
+          </a:p>
+          <a:p>
+            <a:pPr algn="ctr">
+              <a:spcBef>
+                <a:spcPts val="200"/>
+              </a:spcBef>
+              <a:buNone/>
+            </a:pPr>
+            <a:r>
+              <a:rPr lang="en-US" sz="2400" b="0" i="1" dirty="0">
+                <a:solidFill>
+                  <a:srgbClr val="000000"/>
+                </a:solidFill>
+              </a:rPr>
+              <a:t xml:space="preserve">it is what boundary makes the work reasonable</a:t>
+            </a:r>
+          </a:p>
+          <a:p>
+            <a:pPr algn="ctr">
+              <a:spcBef>
+                <a:spcPts val="200"/>
+              </a:spcBef>
+              <a:buNone/>
+            </a:pPr>
+            <a:r>
+              <a:rPr lang="en-US" sz="2400" b="0" i="1" dirty="0">
+                <a:solidFill>
+                  <a:srgbClr val="000000"/>
+                </a:solidFill>
+              </a:rPr>
+              <a:t xml:space="preserve">without breaking the relationships that matter.</a:t>
+            </a:r>
+          </a:p>
+        </p:txBody>
+      </p:sp>
+      <p:sp>
+        <p:nvSpPr>
+          <p:cNvPr id="101" name="Rule"/>
+          <p:cNvSpPr/>
+          <p:nvPr/>
+        </p:nvSpPr>
+        <p:spPr>
+          <a:xfrm>
+            <a:off x="3429000" y="3291840"/>
+            <a:ext cx="2286000" cy="51206"/>
+          </a:xfrm>
+          <a:prstGeom prst="rect">
+            <a:avLst/>
+          </a:prstGeom>
+          <a:solidFill>
+            <a:srgbClr val="8E6F3E"/>
+          </a:solidFill>
+          <a:ln w="12700">
+            <a:solidFill>
+              <a:srgbClr val="8E6F3E"/>
+            </a:solidFill>
+          </a:ln>
+        </p:spPr>
+        <p:txBody>
+          <a:bodyPr wrap="square" lIns="27432" tIns="22860" rIns="27432" bIns="22860" anchor="ctr"/>
+          <a:lstStyle/>
+          <a:p>
+            <a:endParaRPr/>
+          </a:p>
+        </p:txBody>
+      </p:sp>
+      <p:sp>
+        <p:nvSpPr>
+          <p:cNvPr id="102" name="Levers"/>
+          <p:cNvSpPr txBox="1"/>
+          <p:nvPr/>
+        </p:nvSpPr>
+        <p:spPr>
+          <a:xfrm>
+            <a:off x="274320" y="3703320"/>
+            <a:ext cx="8595360" cy="822960"/>
+          </a:xfrm>
+          <a:prstGeom prst="rect">
+            <a:avLst/>
+          </a:prstGeom>
+          <a:noFill/>
+          <a:ln>
+            <a:noFill/>
+          </a:ln>
+        </p:spPr>
+        <p:txBody>
+          <a:bodyPr wrap="square" lIns="0" tIns="0" rIns="0" bIns="0" anchor="t"/>
+          <a:lstStyle/>
+          <a:p>
+            <a:pPr algn="ctr">
+              <a:buNone/>
+            </a:pPr>
+            <a:r>
+              <a:rPr lang="en-US" sz="2000" b="1" i="0" dirty="0">
+                <a:solidFill>
+                  <a:srgbClr val="8E6F3E"/>
+                </a:solidFill>
+              </a:rPr>
+              <a:t xml:space="preserve">scope · decomposition · interfaces</a:t>
+            </a:r>
+          </a:p>
+          <a:p>
+            <a:pPr algn="ctr">
+              <a:spcBef>
+                <a:spcPts val="200"/>
+              </a:spcBef>
+              <a:buNone/>
+            </a:pPr>
+            <a:r>
+              <a:rPr lang="en-US" sz="2000" b="1" i="0" dirty="0">
+                <a:solidFill>
+                  <a:srgbClr val="8E6F3E"/>
+                </a:solidFill>
+              </a:rPr>
+              <a:t xml:space="preserve">intermediate artifacts · checkpoints</a:t>
+            </a:r>
+          </a:p>
+        </p:txBody>
+      </p:sp>
+      <p:sp>
+        <p:nvSpPr>
+          <p:cNvPr id="103" name="Preview"/>
+          <p:cNvSpPr txBox="1"/>
+          <p:nvPr/>
+        </p:nvSpPr>
+        <p:spPr>
+          <a:xfrm>
+            <a:off x="274320" y="4846320"/>
+            <a:ext cx="8595360" cy="411480"/>
+          </a:xfrm>
+          <a:prstGeom prst="rect">
+            <a:avLst/>
+          </a:prstGeom>
+          <a:noFill/>
+          <a:ln>
+            <a:noFill/>
+          </a:ln>
+        </p:spPr>
+        <p:txBody>
+          <a:bodyPr wrap="square" lIns="0" tIns="0" rIns="0" bIns="0" anchor="t"/>
+          <a:lstStyle/>
+          <a:p>
+            <a:pPr algn="ctr">
+              <a:buNone/>
+            </a:pPr>
+            <a:r>
+              <a:rPr lang="en-US" sz="2000" b="0" i="1" dirty="0">
+                <a:solidFill>
+                  <a:srgbClr val="555960"/>
+                </a:solidFill>
+              </a:rPr>
+              <a:t xml:space="preserve">Where the boundary sits decides what the agent must reason about.</a:t>
+            </a:r>
+          </a:p>
+        </p:txBody>
+      </p:sp>
+      <p:sp>
+        <p:nvSpPr>
+          <p:cNvPr id="104" name="FooterBand"/>
+          <p:cNvSpPr/>
+          <p:nvPr/>
+        </p:nvSpPr>
+        <p:spPr>
+          <a:xfrm>
+            <a:off x="274320" y="5852160"/>
+            <a:ext cx="8595360" cy="566928"/>
+          </a:xfrm>
+          <a:prstGeom prst="rect">
+            <a:avLst/>
+          </a:prstGeom>
+          <a:solidFill>
+            <a:srgbClr val="8E6F3E"/>
+          </a:solidFill>
+          <a:ln>
+            <a:noFill/>
+          </a:ln>
+        </p:spPr>
+        <p:txBody>
+          <a:bodyPr wrap="square" lIns="91440" tIns="45720" rIns="91440" bIns="45720" anchor="ctr"/>
+          <a:lstStyle/>
+          <a:p>
+            <a:pPr algn="ctr">
+              <a:buNone/>
+            </a:pPr>
+            <a:r>
+              <a:rPr lang="en-US" sz="2000" b="1" i="0" dirty="0">
+                <a:solidFill>
+                  <a:srgbClr val="FFFFFF"/>
+                </a:solidFill>
+              </a:rPr>
+              <a:t xml:space="preserve">After the break: the reasoning horizon makes this precise.</a:t>
+            </a:r>
+          </a:p>
+        </p:txBody>
+      </p:sp>
+    </p:spTree>
+  </p:cSld>
+  <p:clrMapOvr>
+    <a:masterClrMapping/>
+  </p:clrMapOvr>
+</p:sld>
+</file>
+
+<file path=ppt/slides/slide38.xml><?xml version="1.0" encoding="utf-8"?>
+<p:sld xmlns:a="http://schemas.openxmlformats.org/drawingml/2006/main" xmlns:r="http://schemas.openxmlformats.org/officeDocument/2006/relationships" xmlns:p="http://schemas.openxmlformats.org/presentationml/2006/main">
+  <p:cSld>
+    <p:spTree>
+      <p:nvGrpSpPr>
+        <p:cNvPr id="1" name=""/>
+        <p:cNvGrpSpPr/>
+        <p:nvPr/>
+      </p:nvGrpSpPr>
+      <p:grpSpPr>
+        <a:xfrm>
+          <a:off x="0" y="0"/>
+          <a:ext cx="0" cy="0"/>
+          <a:chOff x="0" y="0"/>
+          <a:chExt cx="0" cy="0"/>
+        </a:xfrm>
+      </p:grpSpPr>
+      <p:sp>
+        <p:nvSpPr>
+          <p:cNvPr id="2" name="Title 1"/>
+          <p:cNvSpPr>
+            <a:spLocks noGrp="1"/>
+          </p:cNvSpPr>
+          <p:nvPr>
+            <p:ph type="title"/>
+          </p:nvPr>
+        </p:nvSpPr>
+        <p:spPr>
+          <a:xfrm>
+            <a:off x="277148" y="118428"/>
+            <a:ext cx="8590000" cy="638175"/>
+          </a:xfrm>
+        </p:spPr>
+        <p:txBody>
+          <a:bodyPr>
+            <a:normAutofit/>
+          </a:bodyPr>
+          <a:lstStyle/>
+          <a:p>
+            <a:pPr>
+              <a:buNone/>
+              <a:defRPr b="0"/>
+            </a:pPr>
+            <a:r>
+              <a:rPr lang="en-US" sz="2400" b="0" i="0" dirty="0">
+                <a:solidFill>
+                  <a:srgbClr val="000000"/>
+                </a:solidFill>
+              </a:rPr>
+              <a:t>Capability is not authority</a:t>
+            </a:r>
+          </a:p>
+        </p:txBody>
+      </p:sp>
+      <p:sp>
+        <p:nvSpPr>
+          <p:cNvPr id="3" name="Slide Number Placeholder 3"/>
+          <p:cNvSpPr>
+            <a:spLocks noGrp="1"/>
+          </p:cNvSpPr>
+          <p:nvPr>
+            <p:ph type="sldNum" sz="quarter" idx="4"/>
+          </p:nvPr>
+        </p:nvSpPr>
+        <p:spPr/>
+        <p:txBody>
+          <a:bodyPr/>
+          <a:lstStyle/>
+          <a:p>
+            <a:fld id="{B7EB45DA-9A0D-DC49-8E02-F30A5DDC21C3}" type="slidenum">
+              <a:rPr lang="en-US" smtClean="0"/>
+              <a:t>35</a:t>
+            </a:fld>
+            <a:endParaRPr lang="en-US"/>
+          </a:p>
+        </p:txBody>
+      </p:sp>
+      <p:sp>
+        <p:nvSpPr>
+          <p:cNvPr id="100" name="P0"/>
+          <p:cNvSpPr/>
+          <p:nvPr/>
+        </p:nvSpPr>
+        <p:spPr>
+          <a:xfrm>
+            <a:off x="402336" y="2057400"/>
+            <a:ext cx="1426464" cy="640080"/>
+          </a:xfrm>
+          <a:prstGeom prst="rect">
+            <a:avLst/>
+          </a:prstGeom>
+          <a:solidFill>
+            <a:srgbClr val="F5F1E8"/>
+          </a:solidFill>
+          <a:ln w="12700">
+            <a:solidFill>
+              <a:srgbClr val="C9B991"/>
+            </a:solidFill>
+          </a:ln>
+        </p:spPr>
+        <p:txBody>
+          <a:bodyPr wrap="square" lIns="27432" tIns="22860" rIns="27432" bIns="22860" anchor="ctr"/>
+          <a:lstStyle/>
+          <a:p>
+            <a:pPr algn="ctr">
+              <a:buNone/>
+            </a:pPr>
+            <a:r>
+              <a:rPr lang="en-US" sz="2000" b="1" i="0" dirty="0">
+                <a:solidFill>
+                  <a:srgbClr val="5C4826"/>
+                </a:solidFill>
+              </a:rPr>
+              <a:t xml:space="preserve">READ</a:t>
+            </a:r>
+          </a:p>
+        </p:txBody>
+      </p:sp>
+      <p:cxnSp>
+        <p:nvCxnSpPr>
+          <p:cNvPr id="110" name="PA0"/>
+          <p:cNvCxnSpPr/>
+          <p:nvPr/>
+        </p:nvCxnSpPr>
+        <p:spPr>
+          <a:xfrm>
+            <a:off x="1842516" y="2377440"/>
+            <a:ext cx="274320" cy="0"/>
+          </a:xfrm>
+          <a:prstGeom prst="straightConnector1">
+            <a:avLst/>
+          </a:prstGeom>
+          <a:ln w="28575">
+            <a:solidFill>
+              <a:srgbClr val="8E6F3E"/>
+            </a:solidFill>
+            <a:tailEnd type="triangle" w="med" len="med"/>
+          </a:ln>
+        </p:spPr>
+      </p:cxnSp>
+      <p:sp>
+        <p:nvSpPr>
+          <p:cNvPr id="101" name="P1"/>
+          <p:cNvSpPr/>
+          <p:nvPr/>
+        </p:nvSpPr>
+        <p:spPr>
+          <a:xfrm>
+            <a:off x="2130408" y="2057400"/>
+            <a:ext cx="1426464" cy="640080"/>
+          </a:xfrm>
+          <a:prstGeom prst="rect">
+            <a:avLst/>
+          </a:prstGeom>
+          <a:solidFill>
+            <a:srgbClr val="F5F1E8"/>
+          </a:solidFill>
+          <a:ln w="12700">
+            <a:solidFill>
+              <a:srgbClr val="C9B991"/>
+            </a:solidFill>
+          </a:ln>
+        </p:spPr>
+        <p:txBody>
+          <a:bodyPr wrap="square" lIns="27432" tIns="22860" rIns="27432" bIns="22860" anchor="ctr"/>
+          <a:lstStyle/>
+          <a:p>
+            <a:pPr algn="ctr">
+              <a:buNone/>
+            </a:pPr>
+            <a:r>
+              <a:rPr lang="en-US" sz="2000" b="1" i="0" dirty="0">
+                <a:solidFill>
+                  <a:srgbClr val="5C4826"/>
+                </a:solidFill>
+              </a:rPr>
+              <a:t xml:space="preserve">PROPOSE</a:t>
+            </a:r>
+          </a:p>
+        </p:txBody>
+      </p:sp>
+      <p:cxnSp>
+        <p:nvCxnSpPr>
+          <p:cNvPr id="111" name="PA1"/>
+          <p:cNvCxnSpPr/>
+          <p:nvPr/>
+        </p:nvCxnSpPr>
+        <p:spPr>
+          <a:xfrm>
+            <a:off x="3570588" y="2377440"/>
+            <a:ext cx="274320" cy="0"/>
+          </a:xfrm>
+          <a:prstGeom prst="straightConnector1">
+            <a:avLst/>
+          </a:prstGeom>
+          <a:ln w="28575">
+            <a:solidFill>
+              <a:srgbClr val="8E6F3E"/>
+            </a:solidFill>
+            <a:tailEnd type="triangle" w="med" len="med"/>
+          </a:ln>
+        </p:spPr>
+      </p:cxnSp>
+      <p:sp>
+        <p:nvSpPr>
+          <p:cNvPr id="102" name="P2"/>
+          <p:cNvSpPr/>
+          <p:nvPr/>
+        </p:nvSpPr>
+        <p:spPr>
+          <a:xfrm>
+            <a:off x="3858480" y="2057400"/>
+            <a:ext cx="1426464" cy="640080"/>
+          </a:xfrm>
+          <a:prstGeom prst="rect">
+            <a:avLst/>
+          </a:prstGeom>
+          <a:solidFill>
+            <a:srgbClr val="F5F1E8"/>
+          </a:solidFill>
+          <a:ln w="12700">
+            <a:solidFill>
+              <a:srgbClr val="C9B991"/>
+            </a:solidFill>
+          </a:ln>
+        </p:spPr>
+        <p:txBody>
+          <a:bodyPr wrap="square" lIns="27432" tIns="22860" rIns="27432" bIns="22860" anchor="ctr"/>
+          <a:lstStyle/>
+          <a:p>
+            <a:pPr algn="ctr">
+              <a:buNone/>
+            </a:pPr>
+            <a:r>
+              <a:rPr lang="en-US" sz="2000" b="1" i="0" dirty="0">
+                <a:solidFill>
+                  <a:srgbClr val="5C4826"/>
+                </a:solidFill>
+              </a:rPr>
+              <a:t xml:space="preserve">MODIFY</a:t>
+            </a:r>
+          </a:p>
+        </p:txBody>
+      </p:sp>
+      <p:cxnSp>
+        <p:nvCxnSpPr>
+          <p:cNvPr id="112" name="PA2"/>
+          <p:cNvCxnSpPr/>
+          <p:nvPr/>
+        </p:nvCxnSpPr>
+        <p:spPr>
+          <a:xfrm>
+            <a:off x="5298660" y="2377440"/>
+            <a:ext cx="274320" cy="0"/>
+          </a:xfrm>
+          <a:prstGeom prst="straightConnector1">
+            <a:avLst/>
+          </a:prstGeom>
+          <a:ln w="28575">
+            <a:solidFill>
+              <a:srgbClr val="8E6F3E"/>
+            </a:solidFill>
+            <a:tailEnd type="triangle" w="med" len="med"/>
+          </a:ln>
+        </p:spPr>
+      </p:cxnSp>
+      <p:sp>
+        <p:nvSpPr>
+          <p:cNvPr id="103" name="P3"/>
+          <p:cNvSpPr/>
+          <p:nvPr/>
+        </p:nvSpPr>
+        <p:spPr>
+          <a:xfrm>
+            <a:off x="5586552" y="2057400"/>
+            <a:ext cx="1426464" cy="640080"/>
+          </a:xfrm>
+          <a:prstGeom prst="rect">
+            <a:avLst/>
+          </a:prstGeom>
+          <a:solidFill>
+            <a:srgbClr val="F5F1E8"/>
+          </a:solidFill>
+          <a:ln w="12700">
+            <a:solidFill>
+              <a:srgbClr val="C9B991"/>
+            </a:solidFill>
+          </a:ln>
+        </p:spPr>
+        <p:txBody>
+          <a:bodyPr wrap="square" lIns="27432" tIns="22860" rIns="27432" bIns="22860" anchor="ctr"/>
+          <a:lstStyle/>
+          <a:p>
+            <a:pPr algn="ctr">
+              <a:buNone/>
+            </a:pPr>
+            <a:r>
+              <a:rPr lang="en-US" sz="2000" b="1" i="0" dirty="0">
+                <a:solidFill>
+                  <a:srgbClr val="5C4826"/>
+                </a:solidFill>
+              </a:rPr>
+              <a:t xml:space="preserve">MERGE</a:t>
+            </a:r>
+          </a:p>
+        </p:txBody>
+      </p:sp>
+      <p:cxnSp>
+        <p:nvCxnSpPr>
+          <p:cNvPr id="113" name="PA3"/>
+          <p:cNvCxnSpPr/>
+          <p:nvPr/>
+        </p:nvCxnSpPr>
+        <p:spPr>
+          <a:xfrm>
+            <a:off x="7026732" y="2377440"/>
+            <a:ext cx="274320" cy="0"/>
+          </a:xfrm>
+          <a:prstGeom prst="straightConnector1">
+            <a:avLst/>
+          </a:prstGeom>
+          <a:ln w="28575">
+            <a:solidFill>
+              <a:srgbClr val="8E6F3E"/>
+            </a:solidFill>
+            <a:tailEnd type="triangle" w="med" len="med"/>
+          </a:ln>
+        </p:spPr>
+      </p:cxnSp>
+      <p:sp>
+        <p:nvSpPr>
+          <p:cNvPr id="104" name="P4"/>
+          <p:cNvSpPr/>
+          <p:nvPr/>
+        </p:nvSpPr>
+        <p:spPr>
+          <a:xfrm>
+            <a:off x="7314624" y="2057400"/>
+            <a:ext cx="1426464" cy="640080"/>
+          </a:xfrm>
+          <a:prstGeom prst="rect">
+            <a:avLst/>
+          </a:prstGeom>
+          <a:solidFill>
+            <a:srgbClr val="F5F1E8"/>
+          </a:solidFill>
+          <a:ln w="12700">
+            <a:solidFill>
+              <a:srgbClr val="C9B991"/>
+            </a:solidFill>
+          </a:ln>
+        </p:spPr>
+        <p:txBody>
+          <a:bodyPr wrap="square" lIns="27432" tIns="22860" rIns="27432" bIns="22860" anchor="ctr"/>
+          <a:lstStyle/>
+          <a:p>
+            <a:pPr algn="ctr">
+              <a:buNone/>
+            </a:pPr>
+            <a:r>
+              <a:rPr lang="en-US" sz="2000" b="1" i="0" dirty="0">
+                <a:solidFill>
+                  <a:srgbClr val="5C4826"/>
+                </a:solidFill>
+              </a:rPr>
+              <a:t xml:space="preserve">DEPLOY</a:t>
+            </a:r>
+          </a:p>
+        </p:txBody>
+      </p:sp>
+      <p:sp>
+        <p:nvSpPr>
+          <p:cNvPr id="120" name="Same"/>
+          <p:cNvSpPr txBox="1"/>
+          <p:nvPr/>
+        </p:nvSpPr>
+        <p:spPr>
+          <a:xfrm>
+            <a:off x="274320" y="3154680"/>
+            <a:ext cx="8595360" cy="411480"/>
+          </a:xfrm>
+          <a:prstGeom prst="rect">
+            <a:avLst/>
+          </a:prstGeom>
+          <a:noFill/>
+          <a:ln>
+            <a:noFill/>
+          </a:ln>
+        </p:spPr>
+        <p:txBody>
+          <a:bodyPr wrap="square" lIns="0" tIns="0" rIns="0" bIns="0" anchor="t"/>
+          <a:lstStyle/>
+          <a:p>
+            <a:pPr algn="ctr">
+              <a:buNone/>
+            </a:pPr>
+            <a:r>
+              <a:rPr lang="en-US" sz="2000" b="0" i="1" dirty="0">
+                <a:solidFill>
+                  <a:srgbClr val="555960"/>
+                </a:solidFill>
+              </a:rPr>
+              <a:t xml:space="preserve">Same agent. Same model. Increasing authority and consequence.</a:t>
+            </a:r>
+          </a:p>
+        </p:txBody>
+      </p:sp>
+      <p:sp>
+        <p:nvSpPr>
+          <p:cNvPr id="121" name="Caption"/>
+          <p:cNvSpPr txBox="1"/>
+          <p:nvPr/>
+        </p:nvSpPr>
+        <p:spPr>
+          <a:xfrm>
+            <a:off x="274320" y="4297680"/>
+            <a:ext cx="8595360" cy="822960"/>
+          </a:xfrm>
+          <a:prstGeom prst="rect">
+            <a:avLst/>
+          </a:prstGeom>
+          <a:noFill/>
+          <a:ln>
+            <a:noFill/>
+          </a:ln>
+        </p:spPr>
+        <p:txBody>
+          <a:bodyPr wrap="square" lIns="0" tIns="0" rIns="0" bIns="0" anchor="t"/>
+          <a:lstStyle/>
+          <a:p>
+            <a:pPr algn="ctr">
+              <a:buNone/>
+            </a:pPr>
+            <a:r>
+              <a:rPr lang="en-US" sz="2000" b="0" i="1" dirty="0">
+                <a:solidFill>
+                  <a:srgbClr val="555960"/>
+                </a:solidFill>
+              </a:rPr>
+              <a:t xml:space="preserve">What an agent can do and what it is permitted to cause</a:t>
+            </a:r>
+          </a:p>
+          <a:p>
+            <a:pPr algn="ctr">
+              <a:spcBef>
+                <a:spcPts val="200"/>
+              </a:spcBef>
+              <a:buNone/>
+            </a:pPr>
+            <a:r>
+              <a:rPr lang="en-US" sz="2000" b="0" i="1" dirty="0">
+                <a:solidFill>
+                  <a:srgbClr val="555960"/>
+                </a:solidFill>
+              </a:rPr>
+              <a:t xml:space="preserve">are separate engineering decisions.</a:t>
+            </a:r>
+          </a:p>
+        </p:txBody>
+      </p:sp>
+      <p:sp>
+        <p:nvSpPr>
+          <p:cNvPr id="122" name="FooterBand"/>
+          <p:cNvSpPr/>
+          <p:nvPr/>
+        </p:nvSpPr>
+        <p:spPr>
+          <a:xfrm>
+            <a:off x="274320" y="5852160"/>
+            <a:ext cx="8595360" cy="566928"/>
+          </a:xfrm>
+          <a:prstGeom prst="rect">
+            <a:avLst/>
+          </a:prstGeom>
+          <a:solidFill>
+            <a:srgbClr val="8E6F3E"/>
+          </a:solidFill>
+          <a:ln>
+            <a:noFill/>
+          </a:ln>
+        </p:spPr>
+        <p:txBody>
+          <a:bodyPr wrap="square" lIns="91440" tIns="45720" rIns="91440" bIns="45720" anchor="ctr"/>
+          <a:lstStyle/>
+          <a:p>
+            <a:pPr algn="ctr">
+              <a:buNone/>
+            </a:pPr>
+            <a:r>
+              <a:rPr lang="en-US" sz="2000" b="1" i="0" dirty="0">
+                <a:solidFill>
+                  <a:srgbClr val="FFFFFF"/>
+                </a:solidFill>
+              </a:rPr>
+              <a:t xml:space="preserve">Authority is engineered independently of capability.</a:t>
+            </a:r>
+          </a:p>
+        </p:txBody>
+      </p:sp>
+    </p:spTree>
+  </p:cSld>
+  <p:clrMapOvr>
+    <a:masterClrMapping/>
+  </p:clrMapOvr>
+</p:sld>
+</file>
+
+<file path=ppt/slides/slide39.xml><?xml version="1.0" encoding="utf-8"?>
+<p:sld xmlns:a="http://schemas.openxmlformats.org/drawingml/2006/main" xmlns:r="http://schemas.openxmlformats.org/officeDocument/2006/relationships" xmlns:p="http://schemas.openxmlformats.org/presentationml/2006/main">
+  <p:cSld>
+    <p:spTree>
+      <p:nvGrpSpPr>
+        <p:cNvPr id="1" name=""/>
+        <p:cNvGrpSpPr/>
+        <p:nvPr/>
+      </p:nvGrpSpPr>
+      <p:grpSpPr>
+        <a:xfrm>
+          <a:off x="0" y="0"/>
+          <a:ext cx="0" cy="0"/>
+          <a:chOff x="0" y="0"/>
+          <a:chExt cx="0" cy="0"/>
+        </a:xfrm>
+      </p:grpSpPr>
+      <p:sp>
+        <p:nvSpPr>
+          <p:cNvPr id="2" name="Title 1"/>
+          <p:cNvSpPr>
+            <a:spLocks noGrp="1"/>
+          </p:cNvSpPr>
+          <p:nvPr>
+            <p:ph type="title"/>
+          </p:nvPr>
+        </p:nvSpPr>
+        <p:spPr>
+          <a:xfrm>
+            <a:off x="277148" y="118428"/>
+            <a:ext cx="8590000" cy="638175"/>
+          </a:xfrm>
+        </p:spPr>
+        <p:txBody>
+          <a:bodyPr>
+            <a:normAutofit/>
+          </a:bodyPr>
+          <a:lstStyle/>
+          <a:p>
+            <a:pPr>
+              <a:buNone/>
+              <a:defRPr b="0"/>
+            </a:pPr>
+            <a:r>
+              <a:rPr lang="en-US" sz="2400" b="0" i="0" dirty="0">
+                <a:solidFill>
+                  <a:srgbClr val="000000"/>
+                </a:solidFill>
+              </a:rPr>
+              <a:t>VERIFY: what evidence closes the delegation?</a:t>
+            </a:r>
+          </a:p>
+        </p:txBody>
+      </p:sp>
+      <p:sp>
+        <p:nvSpPr>
+          <p:cNvPr id="3" name="Slide Number Placeholder 3"/>
+          <p:cNvSpPr>
+            <a:spLocks noGrp="1"/>
+          </p:cNvSpPr>
+          <p:nvPr>
+            <p:ph type="sldNum" sz="quarter" idx="4"/>
+          </p:nvPr>
+        </p:nvSpPr>
+        <p:spPr/>
+        <p:txBody>
+          <a:bodyPr/>
+          <a:lstStyle/>
+          <a:p>
+            <a:fld id="{B7EB45DA-9A0D-DC49-8E02-F30A5DDC21C3}" type="slidenum">
+              <a:rPr lang="en-US" smtClean="0"/>
+              <a:t>38</a:t>
+            </a:fld>
+            <a:endParaRPr lang="en-US"/>
+          </a:p>
+        </p:txBody>
+      </p:sp>
+      <p:sp>
+        <p:nvSpPr>
+          <p:cNvPr id="100" name="HdrL"/>
+          <p:cNvSpPr txBox="1"/>
+          <p:nvPr/>
+        </p:nvSpPr>
+        <p:spPr>
+          <a:xfrm>
+            <a:off x="685800" y="1371600"/>
+            <a:ext cx="3200400" cy="356616"/>
+          </a:xfrm>
+          <a:prstGeom prst="rect">
+            <a:avLst/>
+          </a:prstGeom>
+          <a:noFill/>
+          <a:ln>
+            <a:noFill/>
+          </a:ln>
+        </p:spPr>
+        <p:txBody>
+          <a:bodyPr wrap="square" lIns="0" tIns="0" rIns="0" bIns="0" anchor="t"/>
+          <a:lstStyle/>
+          <a:p>
+            <a:pPr algn="ctr">
+              <a:buNone/>
+            </a:pPr>
+            <a:r>
+              <a:rPr lang="en-US" sz="2000" b="1" i="0" dirty="0">
+                <a:solidFill>
+                  <a:srgbClr val="8E6F3E"/>
+                </a:solidFill>
+              </a:rPr>
+              <a:t xml:space="preserve">DELEGATED WORK</a:t>
+            </a:r>
+          </a:p>
+        </p:txBody>
+      </p:sp>
+      <p:sp>
+        <p:nvSpPr>
+          <p:cNvPr id="101" name="HdrR"/>
+          <p:cNvSpPr txBox="1"/>
+          <p:nvPr/>
+        </p:nvSpPr>
+        <p:spPr>
+          <a:xfrm>
+            <a:off x="5029200" y="1371600"/>
+            <a:ext cx="3429000" cy="356616"/>
+          </a:xfrm>
+          <a:prstGeom prst="rect">
+            <a:avLst/>
+          </a:prstGeom>
+          <a:noFill/>
+          <a:ln>
+            <a:noFill/>
+          </a:ln>
+        </p:spPr>
+        <p:txBody>
+          <a:bodyPr wrap="square" lIns="0" tIns="0" rIns="0" bIns="0" anchor="t"/>
+          <a:lstStyle/>
+          <a:p>
+            <a:pPr algn="ctr">
+              <a:buNone/>
+            </a:pPr>
+            <a:r>
+              <a:rPr lang="en-US" sz="2000" b="1" i="0" dirty="0">
+                <a:solidFill>
+                  <a:srgbClr val="8E6F3E"/>
+                </a:solidFill>
+              </a:rPr>
+              <a:t xml:space="preserve">POSSIBLE EVIDENCE</a:t>
+            </a:r>
+          </a:p>
+        </p:txBody>
+      </p:sp>
+      <p:sp>
+        <p:nvSpPr>
+          <p:cNvPr id="102" name="W0"/>
+          <p:cNvSpPr/>
+          <p:nvPr/>
+        </p:nvSpPr>
+        <p:spPr>
+          <a:xfrm>
+            <a:off x="685800" y="1828800"/>
+            <a:ext cx="3200400" cy="640080"/>
+          </a:xfrm>
+          <a:prstGeom prst="rect">
+            <a:avLst/>
+          </a:prstGeom>
+          <a:solidFill>
+            <a:srgbClr val="F5F1E8"/>
+          </a:solidFill>
+          <a:ln w="12700">
+            <a:solidFill>
+              <a:srgbClr val="C9B991"/>
+            </a:solidFill>
+          </a:ln>
+        </p:spPr>
+        <p:txBody>
+          <a:bodyPr wrap="square" lIns="27432" tIns="22860" rIns="27432" bIns="22860" anchor="ctr"/>
+          <a:lstStyle/>
+          <a:p>
+            <a:pPr algn="ctr">
+              <a:buNone/>
+            </a:pPr>
+            <a:r>
+              <a:rPr lang="en-US" sz="2000" b="1" i="0" dirty="0">
+                <a:solidFill>
+                  <a:srgbClr val="5C4826"/>
+                </a:solidFill>
+              </a:rPr>
+              <a:t xml:space="preserve">a patch</a:t>
+            </a:r>
+          </a:p>
+        </p:txBody>
+      </p:sp>
+      <p:cxnSp>
+        <p:nvCxnSpPr>
+          <p:cNvPr id="103" name="WA0"/>
+          <p:cNvCxnSpPr/>
+          <p:nvPr/>
+        </p:nvCxnSpPr>
+        <p:spPr>
+          <a:xfrm>
+            <a:off x="3977640" y="2148840"/>
+            <a:ext cx="960120" cy="0"/>
+          </a:xfrm>
+          <a:prstGeom prst="straightConnector1">
+            <a:avLst/>
+          </a:prstGeom>
+          <a:ln w="28575">
+            <a:solidFill>
+              <a:srgbClr val="8E6F3E"/>
+            </a:solidFill>
+            <a:tailEnd type="triangle" w="med" len="med"/>
+          </a:ln>
+        </p:spPr>
+      </p:cxnSp>
+      <p:sp>
+        <p:nvSpPr>
+          <p:cNvPr id="104" name="E0"/>
+          <p:cNvSpPr/>
+          <p:nvPr/>
+        </p:nvSpPr>
+        <p:spPr>
+          <a:xfrm>
+            <a:off x="5029200" y="1828800"/>
+            <a:ext cx="3429000" cy="640080"/>
+          </a:xfrm>
+          <a:prstGeom prst="rect">
+            <a:avLst/>
+          </a:prstGeom>
+          <a:solidFill>
+            <a:srgbClr val="FBF8F2"/>
+          </a:solidFill>
+          <a:ln w="12700">
+            <a:solidFill>
+              <a:srgbClr val="C9B991"/>
+            </a:solidFill>
+          </a:ln>
+        </p:spPr>
+        <p:txBody>
+          <a:bodyPr wrap="square" lIns="27432" tIns="22860" rIns="27432" bIns="22860" anchor="ctr"/>
+          <a:lstStyle/>
+          <a:p>
+            <a:pPr algn="ctr">
+              <a:buNone/>
+            </a:pPr>
+            <a:r>
+              <a:rPr lang="en-US" sz="2000" b="0" i="0" dirty="0">
+                <a:solidFill>
+                  <a:srgbClr val="555960"/>
+                </a:solidFill>
+              </a:rPr>
+              <a:t xml:space="preserve">tests + review</a:t>
+            </a:r>
+          </a:p>
+        </p:txBody>
+      </p:sp>
+      <p:sp>
+        <p:nvSpPr>
+          <p:cNvPr id="105" name="W1"/>
+          <p:cNvSpPr/>
+          <p:nvPr/>
+        </p:nvSpPr>
+        <p:spPr>
+          <a:xfrm>
+            <a:off x="685800" y="2606040"/>
+            <a:ext cx="3200400" cy="640080"/>
+          </a:xfrm>
+          <a:prstGeom prst="rect">
+            <a:avLst/>
+          </a:prstGeom>
+          <a:solidFill>
+            <a:srgbClr val="F5F1E8"/>
+          </a:solidFill>
+          <a:ln w="12700">
+            <a:solidFill>
+              <a:srgbClr val="C9B991"/>
+            </a:solidFill>
+          </a:ln>
+        </p:spPr>
+        <p:txBody>
+          <a:bodyPr wrap="square" lIns="27432" tIns="22860" rIns="27432" bIns="22860" anchor="ctr"/>
+          <a:lstStyle/>
+          <a:p>
+            <a:pPr algn="ctr">
+              <a:buNone/>
+            </a:pPr>
+            <a:r>
+              <a:rPr lang="en-US" sz="2000" b="1" i="0" dirty="0">
+                <a:solidFill>
+                  <a:srgbClr val="5C4826"/>
+                </a:solidFill>
+              </a:rPr>
+              <a:t xml:space="preserve">a dependency change</a:t>
+            </a:r>
+          </a:p>
+        </p:txBody>
+      </p:sp>
+      <p:cxnSp>
+        <p:nvCxnSpPr>
+          <p:cNvPr id="106" name="WA1"/>
+          <p:cNvCxnSpPr/>
+          <p:nvPr/>
+        </p:nvCxnSpPr>
+        <p:spPr>
+          <a:xfrm>
+            <a:off x="3977640" y="2926080"/>
+            <a:ext cx="960120" cy="0"/>
+          </a:xfrm>
+          <a:prstGeom prst="straightConnector1">
+            <a:avLst/>
+          </a:prstGeom>
+          <a:ln w="28575">
+            <a:solidFill>
+              <a:srgbClr val="8E6F3E"/>
+            </a:solidFill>
+            <a:tailEnd type="triangle" w="med" len="med"/>
+          </a:ln>
+        </p:spPr>
+      </p:cxnSp>
+      <p:sp>
+        <p:nvSpPr>
+          <p:cNvPr id="107" name="E1"/>
+          <p:cNvSpPr/>
+          <p:nvPr/>
+        </p:nvSpPr>
+        <p:spPr>
+          <a:xfrm>
+            <a:off x="5029200" y="2606040"/>
+            <a:ext cx="3429000" cy="640080"/>
+          </a:xfrm>
+          <a:prstGeom prst="rect">
+            <a:avLst/>
+          </a:prstGeom>
+          <a:solidFill>
+            <a:srgbClr val="FBF8F2"/>
+          </a:solidFill>
+          <a:ln w="12700">
+            <a:solidFill>
+              <a:srgbClr val="C9B991"/>
+            </a:solidFill>
+          </a:ln>
+        </p:spPr>
+        <p:txBody>
+          <a:bodyPr wrap="square" lIns="27432" tIns="22860" rIns="27432" bIns="22860" anchor="ctr"/>
+          <a:lstStyle/>
+          <a:p>
+            <a:pPr algn="ctr">
+              <a:buNone/>
+            </a:pPr>
+            <a:r>
+              <a:rPr lang="en-US" sz="2000" b="0" i="0" dirty="0">
+                <a:solidFill>
+                  <a:srgbClr val="555960"/>
+                </a:solidFill>
+              </a:rPr>
+              <a:t xml:space="preserve">architectural check</a:t>
+            </a:r>
+          </a:p>
+        </p:txBody>
+      </p:sp>
+      <p:sp>
+        <p:nvSpPr>
+          <p:cNvPr id="108" name="W2"/>
+          <p:cNvSpPr/>
+          <p:nvPr/>
+        </p:nvSpPr>
+        <p:spPr>
+          <a:xfrm>
+            <a:off x="685800" y="3383280"/>
+            <a:ext cx="3200400" cy="640080"/>
+          </a:xfrm>
+          <a:prstGeom prst="rect">
+            <a:avLst/>
+          </a:prstGeom>
+          <a:solidFill>
+            <a:srgbClr val="F5F1E8"/>
+          </a:solidFill>
+          <a:ln w="12700">
+            <a:solidFill>
+              <a:srgbClr val="C9B991"/>
+            </a:solidFill>
+          </a:ln>
+        </p:spPr>
+        <p:txBody>
+          <a:bodyPr wrap="square" lIns="27432" tIns="22860" rIns="27432" bIns="22860" anchor="ctr"/>
+          <a:lstStyle/>
+          <a:p>
+            <a:pPr algn="ctr">
+              <a:buNone/>
+            </a:pPr>
+            <a:r>
+              <a:rPr lang="en-US" sz="2000" b="1" i="0" dirty="0">
+                <a:solidFill>
+                  <a:srgbClr val="5C4826"/>
+                </a:solidFill>
+              </a:rPr>
+              <a:t xml:space="preserve">a deployment</a:t>
+            </a:r>
+          </a:p>
+        </p:txBody>
+      </p:sp>
+      <p:cxnSp>
+        <p:nvCxnSpPr>
+          <p:cNvPr id="109" name="WA2"/>
+          <p:cNvCxnSpPr/>
+          <p:nvPr/>
+        </p:nvCxnSpPr>
+        <p:spPr>
+          <a:xfrm>
+            <a:off x="3977640" y="3703320"/>
+            <a:ext cx="960120" cy="0"/>
+          </a:xfrm>
+          <a:prstGeom prst="straightConnector1">
+            <a:avLst/>
+          </a:prstGeom>
+          <a:ln w="28575">
+            <a:solidFill>
+              <a:srgbClr val="8E6F3E"/>
+            </a:solidFill>
+            <a:tailEnd type="triangle" w="med" len="med"/>
+          </a:ln>
+        </p:spPr>
+      </p:cxnSp>
+      <p:sp>
+        <p:nvSpPr>
+          <p:cNvPr id="110" name="E2"/>
+          <p:cNvSpPr/>
+          <p:nvPr/>
+        </p:nvSpPr>
+        <p:spPr>
+          <a:xfrm>
+            <a:off x="5029200" y="3383280"/>
+            <a:ext cx="3429000" cy="640080"/>
+          </a:xfrm>
+          <a:prstGeom prst="rect">
+            <a:avLst/>
+          </a:prstGeom>
+          <a:solidFill>
+            <a:srgbClr val="FBF8F2"/>
+          </a:solidFill>
+          <a:ln w="12700">
+            <a:solidFill>
+              <a:srgbClr val="C9B991"/>
+            </a:solidFill>
+          </a:ln>
+        </p:spPr>
+        <p:txBody>
+          <a:bodyPr wrap="square" lIns="27432" tIns="22860" rIns="27432" bIns="22860" anchor="ctr"/>
+          <a:lstStyle/>
+          <a:p>
+            <a:pPr algn="ctr">
+              <a:buNone/>
+            </a:pPr>
+            <a:r>
+              <a:rPr lang="en-US" sz="2000" b="0" i="0" dirty="0">
+                <a:solidFill>
+                  <a:srgbClr val="555960"/>
+                </a:solidFill>
+              </a:rPr>
+              <a:t xml:space="preserve">tests + policy / admission checks</a:t>
+            </a:r>
+          </a:p>
+        </p:txBody>
+      </p:sp>
+      <p:sp>
+        <p:nvSpPr>
+          <p:cNvPr id="120" name="Claim"/>
+          <p:cNvSpPr txBox="1"/>
+          <p:nvPr/>
+        </p:nvSpPr>
+        <p:spPr>
+          <a:xfrm>
+            <a:off x="274320" y="4526280"/>
+            <a:ext cx="8595360" cy="822960"/>
+          </a:xfrm>
+          <a:prstGeom prst="rect">
+            <a:avLst/>
+          </a:prstGeom>
+          <a:noFill/>
+          <a:ln>
+            <a:noFill/>
+          </a:ln>
+        </p:spPr>
+        <p:txBody>
+          <a:bodyPr wrap="square" lIns="0" tIns="0" rIns="0" bIns="0" anchor="t"/>
+          <a:lstStyle/>
+          <a:p>
+            <a:pPr algn="ctr">
+              <a:buNone/>
+            </a:pPr>
+            <a:r>
+              <a:rPr lang="en-US" sz="2000" b="0" i="1" dirty="0">
+                <a:solidFill>
+                  <a:srgbClr val="555960"/>
+                </a:solidFill>
+              </a:rPr>
+              <a:t xml:space="preserve">The evidentiary burden comes from the claim and its consequences,</a:t>
+            </a:r>
+          </a:p>
+          <a:p>
+            <a:pPr algn="ctr">
+              <a:spcBef>
+                <a:spcPts val="200"/>
+              </a:spcBef>
+              <a:buNone/>
+            </a:pPr>
+            <a:r>
+              <a:rPr lang="en-US" sz="2000" b="0" i="1" dirty="0">
+                <a:solidFill>
+                  <a:srgbClr val="555960"/>
+                </a:solidFill>
+              </a:rPr>
+              <a:t xml:space="preserve">not from whether a human or an agent produced the artifact.</a:t>
+            </a:r>
+          </a:p>
+        </p:txBody>
+      </p:sp>
+      <p:sp>
+        <p:nvSpPr>
+          <p:cNvPr id="121" name="FooterBand"/>
+          <p:cNvSpPr/>
+          <p:nvPr/>
+        </p:nvSpPr>
+        <p:spPr>
+          <a:xfrm>
+            <a:off x="274320" y="5852160"/>
+            <a:ext cx="8595360" cy="566928"/>
+          </a:xfrm>
+          <a:prstGeom prst="rect">
+            <a:avLst/>
+          </a:prstGeom>
+          <a:solidFill>
+            <a:srgbClr val="8E6F3E"/>
+          </a:solidFill>
+          <a:ln>
+            <a:noFill/>
+          </a:ln>
+        </p:spPr>
+        <p:txBody>
+          <a:bodyPr wrap="square" lIns="91440" tIns="45720" rIns="91440" bIns="45720" anchor="ctr"/>
+          <a:lstStyle/>
+          <a:p>
+            <a:pPr algn="ctr">
+              <a:buNone/>
+            </a:pPr>
+            <a:r>
+              <a:rPr lang="en-US" sz="2000" b="1" i="0" dirty="0">
+                <a:solidFill>
+                  <a:srgbClr val="FFFFFF"/>
+                </a:solidFill>
+              </a:rPr>
+              <a:t xml:space="preserve">Evidence follows the claim — not the author.</a:t>
             </a:r>
           </a:p>
         </p:txBody>
@@ -22281,7 +24852,7 @@
                   <a:srgbClr val="8E6F3E"/>
                 </a:solidFill>
               </a:rPr>
-              <a:t>SECTION 1</a:t>
+              <a:t>EQUIP · THE MODEL</a:t>
             </a:r>
           </a:p>
         </p:txBody>
@@ -22303,7 +24874,7 @@
           <a:p>
             <a:fld id="{B7EB45DA-9A0D-DC49-8E02-F30A5DDC21C3}" type="slidenum">
               <a:rPr lang="en-US" smtClean="0"/>
-              <a:t>4</a:t>
+              <a:t>7</a:t>
             </a:fld>
             <a:endParaRPr lang="en-US"/>
           </a:p>
@@ -22335,6 +24906,382 @@
           <a:lstStyle/>
           <a:p>
             <a:endParaRPr/>
+          </a:p>
+        </p:txBody>
+      </p:sp>
+    </p:spTree>
+  </p:cSld>
+  <p:clrMapOvr>
+    <a:masterClrMapping/>
+  </p:clrMapOvr>
+</p:sld>
+</file>
+
+<file path=ppt/slides/slide40.xml><?xml version="1.0" encoding="utf-8"?>
+<p:sld xmlns:a="http://schemas.openxmlformats.org/drawingml/2006/main" xmlns:r="http://schemas.openxmlformats.org/officeDocument/2006/relationships" xmlns:p="http://schemas.openxmlformats.org/presentationml/2006/main">
+  <p:cSld>
+    <p:spTree>
+      <p:nvGrpSpPr>
+        <p:cNvPr id="1" name=""/>
+        <p:cNvGrpSpPr/>
+        <p:nvPr/>
+      </p:nvGrpSpPr>
+      <p:grpSpPr>
+        <a:xfrm>
+          <a:off x="0" y="0"/>
+          <a:ext cx="0" cy="0"/>
+          <a:chOff x="0" y="0"/>
+          <a:chExt cx="0" cy="0"/>
+        </a:xfrm>
+      </p:grpSpPr>
+      <p:sp>
+        <p:nvSpPr>
+          <p:cNvPr id="2" name="Title 1"/>
+          <p:cNvSpPr>
+            <a:spLocks noGrp="1"/>
+          </p:cNvSpPr>
+          <p:nvPr>
+            <p:ph type="title"/>
+          </p:nvPr>
+        </p:nvSpPr>
+        <p:spPr>
+          <a:xfrm>
+            <a:off x="277148" y="118428"/>
+            <a:ext cx="8590000" cy="638175"/>
+          </a:xfrm>
+        </p:spPr>
+        <p:txBody>
+          <a:bodyPr>
+            <a:normAutofit/>
+          </a:bodyPr>
+          <a:lstStyle/>
+          <a:p>
+            <a:pPr>
+              <a:buNone/>
+              <a:defRPr b="0"/>
+            </a:pPr>
+            <a:r>
+              <a:rPr lang="en-US" sz="2400" b="0" i="0" dirty="0">
+                <a:solidFill>
+                  <a:srgbClr val="000000"/>
+                </a:solidFill>
+              </a:rPr>
+              <a:t>The agent’s confidence is not independent evidence</a:t>
+            </a:r>
+          </a:p>
+        </p:txBody>
+      </p:sp>
+      <p:sp>
+        <p:nvSpPr>
+          <p:cNvPr id="3" name="Slide Number Placeholder 3"/>
+          <p:cNvSpPr>
+            <a:spLocks noGrp="1"/>
+          </p:cNvSpPr>
+          <p:nvPr>
+            <p:ph type="sldNum" sz="quarter" idx="4"/>
+          </p:nvPr>
+        </p:nvSpPr>
+        <p:spPr/>
+        <p:txBody>
+          <a:bodyPr/>
+          <a:lstStyle/>
+          <a:p>
+            <a:fld id="{B7EB45DA-9A0D-DC49-8E02-F30A5DDC21C3}" type="slidenum">
+              <a:rPr lang="en-US" smtClean="0"/>
+              <a:t>39</a:t>
+            </a:fld>
+            <a:endParaRPr lang="en-US"/>
+          </a:p>
+        </p:txBody>
+      </p:sp>
+      <p:sp>
+        <p:nvSpPr>
+          <p:cNvPr id="100" name="C0"/>
+          <p:cNvSpPr/>
+          <p:nvPr/>
+        </p:nvSpPr>
+        <p:spPr>
+          <a:xfrm>
+            <a:off x="502920" y="2057400"/>
+            <a:ext cx="2377440" cy="1005840"/>
+          </a:xfrm>
+          <a:prstGeom prst="rect">
+            <a:avLst/>
+          </a:prstGeom>
+          <a:solidFill>
+            <a:srgbClr val="F5F1E8"/>
+          </a:solidFill>
+          <a:ln w="12700">
+            <a:solidFill>
+              <a:srgbClr val="C9B991"/>
+            </a:solidFill>
+          </a:ln>
+        </p:spPr>
+        <p:txBody>
+          <a:bodyPr wrap="square" lIns="27432" tIns="22860" rIns="27432" bIns="22860" anchor="ctr"/>
+          <a:lstStyle/>
+          <a:p>
+            <a:pPr algn="ctr">
+              <a:buNone/>
+            </a:pPr>
+            <a:r>
+              <a:rPr lang="en-US" sz="2000" b="1" i="0" dirty="0">
+                <a:solidFill>
+                  <a:srgbClr val="5C4826"/>
+                </a:solidFill>
+              </a:rPr>
+              <a:t xml:space="preserve">AGENT</a:t>
+            </a:r>
+          </a:p>
+          <a:p>
+            <a:pPr algn="ctr">
+              <a:spcBef>
+                <a:spcPts val="100"/>
+              </a:spcBef>
+              <a:buNone/>
+            </a:pPr>
+            <a:r>
+              <a:rPr lang="en-US" sz="2000" b="0" i="0" dirty="0">
+                <a:solidFill>
+                  <a:srgbClr val="555960"/>
+                </a:solidFill>
+              </a:rPr>
+              <a:t xml:space="preserve">produces an artifact</a:t>
+            </a:r>
+          </a:p>
+        </p:txBody>
+      </p:sp>
+      <p:cxnSp>
+        <p:nvCxnSpPr>
+          <p:cNvPr id="101" name="CA0"/>
+          <p:cNvCxnSpPr/>
+          <p:nvPr/>
+        </p:nvCxnSpPr>
+        <p:spPr>
+          <a:xfrm>
+            <a:off x="2971800" y="2560320"/>
+            <a:ext cx="411480" cy="0"/>
+          </a:xfrm>
+          <a:prstGeom prst="straightConnector1">
+            <a:avLst/>
+          </a:prstGeom>
+          <a:ln w="28575">
+            <a:solidFill>
+              <a:srgbClr val="8E6F3E"/>
+            </a:solidFill>
+            <a:tailEnd type="triangle" w="med" len="med"/>
+          </a:ln>
+        </p:spPr>
+      </p:cxnSp>
+      <p:sp>
+        <p:nvSpPr>
+          <p:cNvPr id="102" name="C1"/>
+          <p:cNvSpPr/>
+          <p:nvPr/>
+        </p:nvSpPr>
+        <p:spPr>
+          <a:xfrm>
+            <a:off x="3474720" y="2057400"/>
+            <a:ext cx="2377440" cy="1005840"/>
+          </a:xfrm>
+          <a:prstGeom prst="rect">
+            <a:avLst/>
+          </a:prstGeom>
+          <a:solidFill>
+            <a:srgbClr val="F5F1E8"/>
+          </a:solidFill>
+          <a:ln w="12700">
+            <a:solidFill>
+              <a:srgbClr val="C9B991"/>
+            </a:solidFill>
+          </a:ln>
+        </p:spPr>
+        <p:txBody>
+          <a:bodyPr wrap="square" lIns="27432" tIns="22860" rIns="27432" bIns="22860" anchor="ctr"/>
+          <a:lstStyle/>
+          <a:p>
+            <a:pPr algn="ctr">
+              <a:buNone/>
+            </a:pPr>
+            <a:r>
+              <a:rPr lang="en-US" sz="2000" b="1" i="0" dirty="0">
+                <a:solidFill>
+                  <a:srgbClr val="5C4826"/>
+                </a:solidFill>
+              </a:rPr>
+              <a:t xml:space="preserve">ENVIRONMENT</a:t>
+            </a:r>
+          </a:p>
+          <a:p>
+            <a:pPr algn="ctr">
+              <a:spcBef>
+                <a:spcPts val="100"/>
+              </a:spcBef>
+              <a:buNone/>
+            </a:pPr>
+            <a:r>
+              <a:rPr lang="en-US" sz="2000" b="0" i="0" dirty="0">
+                <a:solidFill>
+                  <a:srgbClr val="555960"/>
+                </a:solidFill>
+              </a:rPr>
+              <a:t xml:space="preserve">obtains and checks evidence</a:t>
+            </a:r>
+          </a:p>
+        </p:txBody>
+      </p:sp>
+      <p:cxnSp>
+        <p:nvCxnSpPr>
+          <p:cNvPr id="103" name="CA1"/>
+          <p:cNvCxnSpPr/>
+          <p:nvPr/>
+        </p:nvCxnSpPr>
+        <p:spPr>
+          <a:xfrm>
+            <a:off x="5943600" y="2560320"/>
+            <a:ext cx="411480" cy="0"/>
+          </a:xfrm>
+          <a:prstGeom prst="straightConnector1">
+            <a:avLst/>
+          </a:prstGeom>
+          <a:ln w="28575">
+            <a:solidFill>
+              <a:srgbClr val="8E6F3E"/>
+            </a:solidFill>
+            <a:tailEnd type="triangle" w="med" len="med"/>
+          </a:ln>
+        </p:spPr>
+      </p:cxnSp>
+      <p:sp>
+        <p:nvSpPr>
+          <p:cNvPr id="104" name="C2"/>
+          <p:cNvSpPr/>
+          <p:nvPr/>
+        </p:nvSpPr>
+        <p:spPr>
+          <a:xfrm>
+            <a:off x="6446520" y="2057400"/>
+            <a:ext cx="2194560" cy="1005840"/>
+          </a:xfrm>
+          <a:prstGeom prst="rect">
+            <a:avLst/>
+          </a:prstGeom>
+          <a:solidFill>
+            <a:srgbClr val="F5F1E8"/>
+          </a:solidFill>
+          <a:ln w="12700">
+            <a:solidFill>
+              <a:srgbClr val="C9B991"/>
+            </a:solidFill>
+          </a:ln>
+        </p:spPr>
+        <p:txBody>
+          <a:bodyPr wrap="square" lIns="27432" tIns="22860" rIns="27432" bIns="22860" anchor="ctr"/>
+          <a:lstStyle/>
+          <a:p>
+            <a:pPr algn="ctr">
+              <a:buNone/>
+            </a:pPr>
+            <a:r>
+              <a:rPr lang="en-US" sz="2000" b="1" i="0" dirty="0">
+                <a:solidFill>
+                  <a:srgbClr val="5C4826"/>
+                </a:solidFill>
+              </a:rPr>
+              <a:t xml:space="preserve">ACCEPTANCE</a:t>
+            </a:r>
+          </a:p>
+          <a:p>
+            <a:pPr algn="ctr">
+              <a:spcBef>
+                <a:spcPts val="100"/>
+              </a:spcBef>
+              <a:buNone/>
+            </a:pPr>
+            <a:r>
+              <a:rPr lang="en-US" sz="2000" b="0" i="0" dirty="0">
+                <a:solidFill>
+                  <a:srgbClr val="555960"/>
+                </a:solidFill>
+              </a:rPr>
+              <a:t xml:space="preserve">the engineering decision</a:t>
+            </a:r>
+          </a:p>
+        </p:txBody>
+      </p:sp>
+      <p:sp>
+        <p:nvSpPr>
+          <p:cNvPr id="105" name="Line"/>
+          <p:cNvSpPr txBox="1"/>
+          <p:nvPr/>
+        </p:nvSpPr>
+        <p:spPr>
+          <a:xfrm>
+            <a:off x="274320" y="3794760"/>
+            <a:ext cx="8595360" cy="411480"/>
+          </a:xfrm>
+          <a:prstGeom prst="rect">
+            <a:avLst/>
+          </a:prstGeom>
+          <a:noFill/>
+          <a:ln>
+            <a:noFill/>
+          </a:ln>
+        </p:spPr>
+        <p:txBody>
+          <a:bodyPr wrap="square" lIns="0" tIns="0" rIns="0" bIns="0" anchor="t"/>
+          <a:lstStyle/>
+          <a:p>
+            <a:pPr algn="ctr">
+              <a:buNone/>
+            </a:pPr>
+            <a:r>
+              <a:rPr lang="en-US" sz="2000" b="0" i="1" dirty="0">
+                <a:solidFill>
+                  <a:srgbClr val="555960"/>
+                </a:solidFill>
+              </a:rPr>
+              <a:t xml:space="preserve">Self-report is a claim to verify, not evidence to accept.</a:t>
+            </a:r>
+          </a:p>
+        </p:txBody>
+      </p:sp>
+      <p:sp>
+        <p:nvSpPr>
+          <p:cNvPr id="106" name="FooterBand"/>
+          <p:cNvSpPr/>
+          <p:nvPr/>
+        </p:nvSpPr>
+        <p:spPr>
+          <a:xfrm>
+            <a:off x="274320" y="5852160"/>
+            <a:ext cx="8595360" cy="566928"/>
+          </a:xfrm>
+          <a:prstGeom prst="rect">
+            <a:avLst/>
+          </a:prstGeom>
+          <a:solidFill>
+            <a:srgbClr val="8E6F3E"/>
+          </a:solidFill>
+          <a:ln>
+            <a:noFill/>
+          </a:ln>
+        </p:spPr>
+        <p:txBody>
+          <a:bodyPr wrap="square" lIns="91440" tIns="45720" rIns="91440" bIns="45720" anchor="ctr"/>
+          <a:lstStyle/>
+          <a:p>
+            <a:pPr algn="ctr">
+              <a:buNone/>
+            </a:pPr>
+            <a:r>
+              <a:rPr lang="en-US" sz="2000" b="1" i="0" dirty="0">
+                <a:solidFill>
+                  <a:srgbClr val="FFFFFF"/>
+                </a:solidFill>
+              </a:rPr>
+              <a:t xml:space="preserve">Acceptance rests on evidence the environment checks.</a:t>
+            </a:r>
           </a:p>
         </p:txBody>
       </p:sp>
@@ -22417,7 +25364,7 @@
           <a:p>
             <a:fld id="{B7EB45DA-9A0D-DC49-8E02-F30A5DDC21C3}" type="slidenum">
               <a:rPr lang="en-US" smtClean="0"/>
-              <a:t>5</a:t>
+              <a:t>8</a:t>
             </a:fld>
             <a:endParaRPr lang="en-US"/>
           </a:p>
@@ -23062,7 +26009,7 @@
           <a:p>
             <a:fld id="{B7EB45DA-9A0D-DC49-8E02-F30A5DDC21C3}" type="slidenum">
               <a:rPr lang="en-US" smtClean="0"/>
-              <a:t>6</a:t>
+              <a:t>9</a:t>
             </a:fld>
             <a:endParaRPr lang="en-US"/>
           </a:p>
@@ -23704,7 +26651,7 @@
           <a:p>
             <a:fld id="{B7EB45DA-9A0D-DC49-8E02-F30A5DDC21C3}" type="slidenum">
               <a:rPr lang="en-US" smtClean="0"/>
-              <a:t>7</a:t>
+              <a:t>10</a:t>
             </a:fld>
             <a:endParaRPr lang="en-US"/>
           </a:p>
@@ -25037,7 +27984,7 @@
                   <a:srgbClr val="8E6F3E"/>
                 </a:solidFill>
               </a:rPr>
-              <a:t>SECTION 2</a:t>
+              <a:t>EQUIP · THE HARNESS</a:t>
             </a:r>
           </a:p>
         </p:txBody>
@@ -25059,7 +28006,7 @@
           <a:p>
             <a:fld id="{B7EB45DA-9A0D-DC49-8E02-F30A5DDC21C3}" type="slidenum">
               <a:rPr lang="en-US" smtClean="0"/>
-              <a:t>8</a:t>
+              <a:t>11</a:t>
             </a:fld>
             <a:endParaRPr lang="en-US"/>
           </a:p>
@@ -25173,7 +28120,7 @@
           <a:p>
             <a:fld id="{B7EB45DA-9A0D-DC49-8E02-F30A5DDC21C3}" type="slidenum">
               <a:rPr lang="en-US" smtClean="0"/>
-              <a:t>9</a:t>
+              <a:t>12</a:t>
             </a:fld>
             <a:endParaRPr lang="en-US"/>
           </a:p>

--- a/course/lectures/act-2-building-systems-and-governing-changes/01-agent-levers/2-1-Agents.pptx
+++ b/course/lectures/act-2-building-systems-and-governing-changes/01-agent-levers/2-1-Agents.pptx
@@ -13406,7 +13406,7 @@
           <a:p>
             <a:pPr algn="ctr">
               <a:spcBef>
-                <a:spcPts val="300"/>
+                <a:spcPts val="900"/>
               </a:spcBef>
               <a:buNone/>
             </a:pPr>
@@ -17237,7 +17237,7 @@
         </p:nvSpPr>
         <p:spPr>
           <a:xfrm>
-            <a:off x="365760" y="5897880"/>
+            <a:off x="365760" y="5730000"/>
             <a:ext cx="8412480" cy="457200"/>
           </a:xfrm>
           <a:prstGeom prst="rect">
@@ -19805,7 +19805,7 @@
         </p:nvSpPr>
         <p:spPr>
           <a:xfrm>
-            <a:off x="685800" y="1234440"/>
+            <a:off x="1143000" y="1234440"/>
             <a:ext cx="2103120" cy="640080"/>
           </a:xfrm>
           <a:prstGeom prst="rect">
@@ -19846,7 +19846,7 @@
         </p:nvSpPr>
         <p:spPr>
           <a:xfrm>
-            <a:off x="3063240" y="1371600"/>
+            <a:off x="3520440" y="1371600"/>
             <a:ext cx="5715000" cy="411480"/>
           </a:xfrm>
           <a:prstGeom prst="rect">
@@ -19883,7 +19883,7 @@
         </p:nvSpPr>
         <p:spPr>
           <a:xfrm>
-            <a:off x="685800" y="2011680"/>
+            <a:off x="1143000" y="2103120"/>
             <a:ext cx="2103120" cy="640080"/>
           </a:xfrm>
           <a:prstGeom prst="rect">
@@ -19924,7 +19924,7 @@
         </p:nvSpPr>
         <p:spPr>
           <a:xfrm>
-            <a:off x="3063240" y="2148840"/>
+            <a:off x="3520440" y="2240280"/>
             <a:ext cx="5715000" cy="411480"/>
           </a:xfrm>
           <a:prstGeom prst="rect">
@@ -19961,7 +19961,7 @@
         </p:nvSpPr>
         <p:spPr>
           <a:xfrm>
-            <a:off x="685800" y="2788920"/>
+            <a:off x="1143000" y="2971800"/>
             <a:ext cx="2103120" cy="640080"/>
           </a:xfrm>
           <a:prstGeom prst="rect">
@@ -20002,7 +20002,7 @@
         </p:nvSpPr>
         <p:spPr>
           <a:xfrm>
-            <a:off x="3063240" y="2926080"/>
+            <a:off x="3520440" y="3108960"/>
             <a:ext cx="5715000" cy="411480"/>
           </a:xfrm>
           <a:prstGeom prst="rect">
@@ -20039,7 +20039,7 @@
         </p:nvSpPr>
         <p:spPr>
           <a:xfrm>
-            <a:off x="685800" y="3566160"/>
+            <a:off x="1143000" y="3840480"/>
             <a:ext cx="2103120" cy="640080"/>
           </a:xfrm>
           <a:prstGeom prst="rect">
@@ -20080,7 +20080,7 @@
         </p:nvSpPr>
         <p:spPr>
           <a:xfrm>
-            <a:off x="3063240" y="3703320"/>
+            <a:off x="3520440" y="3977640"/>
             <a:ext cx="5715000" cy="411480"/>
           </a:xfrm>
           <a:prstGeom prst="rect">
@@ -22013,8 +22013,8 @@
         </p:nvSpPr>
         <p:spPr>
           <a:xfrm>
-            <a:off x="685800" y="1463040"/>
-            <a:ext cx="1371600" cy="594360"/>
+            <a:off x="717804" y="1463040"/>
+            <a:ext cx="1700784" cy="594360"/>
           </a:xfrm>
           <a:prstGeom prst="rect">
             <a:avLst/>
@@ -22054,8 +22054,8 @@
         </p:nvCxnSpPr>
         <p:spPr>
           <a:xfrm>
-            <a:off x="2103120" y="1755648"/>
-            <a:ext cx="365760" cy="0"/>
+            <a:off x="2432304" y="1755648"/>
+            <a:ext cx="274320" cy="0"/>
           </a:xfrm>
           <a:prstGeom prst="straightConnector1">
             <a:avLst/>
@@ -22076,8 +22076,8 @@
         </p:nvSpPr>
         <p:spPr>
           <a:xfrm>
-            <a:off x="2514600" y="1463040"/>
-            <a:ext cx="1554480" cy="594360"/>
+            <a:off x="2720340" y="1463040"/>
+            <a:ext cx="1700784" cy="594360"/>
           </a:xfrm>
           <a:prstGeom prst="rect">
             <a:avLst/>
@@ -22117,8 +22117,8 @@
         </p:nvCxnSpPr>
         <p:spPr>
           <a:xfrm>
-            <a:off x="4114800" y="1755648"/>
-            <a:ext cx="365760" cy="0"/>
+            <a:off x="4434840" y="1755648"/>
+            <a:ext cx="274320" cy="0"/>
           </a:xfrm>
           <a:prstGeom prst="straightConnector1">
             <a:avLst/>
@@ -22139,8 +22139,8 @@
         </p:nvSpPr>
         <p:spPr>
           <a:xfrm>
-            <a:off x="4526280" y="1463040"/>
-            <a:ext cx="1920240" cy="594360"/>
+            <a:off x="4722876" y="1463040"/>
+            <a:ext cx="1700784" cy="594360"/>
           </a:xfrm>
           <a:prstGeom prst="rect">
             <a:avLst/>
@@ -22180,8 +22180,8 @@
         </p:nvCxnSpPr>
         <p:spPr>
           <a:xfrm>
-            <a:off x="6492240" y="1755648"/>
-            <a:ext cx="365760" cy="0"/>
+            <a:off x="6437376" y="1755648"/>
+            <a:ext cx="274320" cy="0"/>
           </a:xfrm>
           <a:prstGeom prst="straightConnector1">
             <a:avLst/>
@@ -22202,8 +22202,8 @@
         </p:nvSpPr>
         <p:spPr>
           <a:xfrm>
-            <a:off x="6903720" y="1463040"/>
-            <a:ext cx="1280160" cy="594360"/>
+            <a:off x="6725412" y="1463040"/>
+            <a:ext cx="1700784" cy="594360"/>
           </a:xfrm>
           <a:prstGeom prst="rect">
             <a:avLst/>
@@ -22243,7 +22243,7 @@
         </p:nvSpPr>
         <p:spPr>
           <a:xfrm>
-            <a:off x="274320" y="2222500"/>
+            <a:off x="274320" y="2160000"/>
             <a:ext cx="8595360" cy="1250000"/>
           </a:xfrm>
           <a:prstGeom prst="rect">
@@ -22727,7 +22727,7 @@
         </p:nvSpPr>
         <p:spPr>
           <a:xfrm>
-            <a:off x="685800" y="1554480"/>
+            <a:off x="685800" y="1874520"/>
             <a:ext cx="7772400" cy="356616"/>
           </a:xfrm>
           <a:prstGeom prst="rect">
@@ -22768,7 +22768,7 @@
         </p:nvSpPr>
         <p:spPr>
           <a:xfrm>
-            <a:off x="685800" y="2057400"/>
+            <a:off x="685800" y="2377440"/>
             <a:ext cx="7772400" cy="1371600"/>
           </a:xfrm>
         </p:spPr>
@@ -22829,7 +22829,7 @@
         </p:nvSpPr>
         <p:spPr>
           <a:xfrm>
-            <a:off x="3429000" y="3703320"/>
+            <a:off x="3429000" y="4023360"/>
             <a:ext cx="2286000" cy="51206"/>
           </a:xfrm>
           <a:prstGeom prst="rect">
@@ -22860,7 +22860,7 @@
         </p:nvSpPr>
         <p:spPr>
           <a:xfrm>
-            <a:off x="274320" y="4114800"/>
+            <a:off x="274320" y="4434840"/>
             <a:ext cx="8595360" cy="411480"/>
           </a:xfrm>
           <a:prstGeom prst="rect">
@@ -22897,7 +22897,7 @@
         </p:nvSpPr>
         <p:spPr>
           <a:xfrm>
-            <a:off x="274320" y="4754880"/>
+            <a:off x="274320" y="5074920"/>
             <a:ext cx="8595360" cy="457200"/>
           </a:xfrm>
           <a:prstGeom prst="rect">
@@ -23019,8 +23019,8 @@
         </p:nvSpPr>
         <p:spPr>
           <a:xfrm>
-            <a:off x="685800" y="1600200"/>
-            <a:ext cx="2103120" cy="1828800"/>
+            <a:off x="594360" y="1600200"/>
+            <a:ext cx="2423160" cy="1828800"/>
           </a:xfrm>
           <a:prstGeom prst="rect">
             <a:avLst/>
@@ -23076,8 +23076,8 @@
         </p:nvCxnSpPr>
         <p:spPr>
           <a:xfrm>
-            <a:off x="2925024" y="2514600"/>
-            <a:ext cx="457200" cy="0"/>
+            <a:off x="3086100" y="2514600"/>
+            <a:ext cx="365760" cy="0"/>
           </a:xfrm>
           <a:prstGeom prst="straightConnector1">
             <a:avLst/>
@@ -23215,14 +23215,14 @@
       </p:sp>
       <p:sp>
         <p:nvSpPr>
-          <p:cNvPr id="105" name="Glue"/>
+          <p:cNvPr id="140" name="G140"/>
           <p:cNvSpPr txBox="1"/>
           <p:nvPr/>
         </p:nvSpPr>
         <p:spPr>
           <a:xfrm>
-            <a:off x="5760720" y="1600200"/>
-            <a:ext cx="3108960" cy="1828800"/>
+            <a:off x="5760720" y="1691640"/>
+            <a:ext cx="3017520" cy="365760"/>
           </a:xfrm>
           <a:prstGeom prst="rect">
             <a:avLst/>
@@ -23236,7 +23236,7 @@
           <a:bodyPr wrap="square" lIns="0" tIns="0" rIns="0" bIns="0" anchor="t"/>
           <a:lstStyle/>
           <a:p>
-            <a:pPr algn="ctr">
+            <a:pPr algn="l">
               <a:buNone/>
             </a:pPr>
             <a:r>
@@ -23245,14 +23245,35 @@
                   <a:srgbClr val="555960"/>
                 </a:solidFill>
               </a:rPr>
-              <a:t xml:space="preserve">explicit intermediate artifacts</a:t>
-            </a:r>
-          </a:p>
-          <a:p>
-            <a:pPr algn="ctr">
-              <a:spcBef>
-                <a:spcPts val="300"/>
-              </a:spcBef>
+              <a:t xml:space="preserve">intermediate artifacts</a:t>
+            </a:r>
+          </a:p>
+        </p:txBody>
+      </p:sp>
+      <p:sp>
+        <p:nvSpPr>
+          <p:cNvPr id="141" name="G141"/>
+          <p:cNvSpPr txBox="1"/>
+          <p:nvPr/>
+        </p:nvSpPr>
+        <p:spPr>
+          <a:xfrm>
+            <a:off x="5760720" y="2331720"/>
+            <a:ext cx="3017520" cy="365760"/>
+          </a:xfrm>
+          <a:prstGeom prst="rect">
+            <a:avLst/>
+          </a:prstGeom>
+          <a:noFill/>
+          <a:ln>
+            <a:noFill/>
+          </a:ln>
+        </p:spPr>
+        <p:txBody>
+          <a:bodyPr wrap="square" lIns="0" tIns="0" rIns="0" bIns="0" anchor="t"/>
+          <a:lstStyle/>
+          <a:p>
+            <a:pPr algn="l">
               <a:buNone/>
             </a:pPr>
             <a:r>
@@ -23264,11 +23285,32 @@
               <a:t xml:space="preserve">checkpoints between stages</a:t>
             </a:r>
           </a:p>
-          <a:p>
-            <a:pPr algn="ctr">
-              <a:spcBef>
-                <a:spcPts val="300"/>
-              </a:spcBef>
+        </p:txBody>
+      </p:sp>
+      <p:sp>
+        <p:nvSpPr>
+          <p:cNvPr id="142" name="G142"/>
+          <p:cNvSpPr txBox="1"/>
+          <p:nvPr/>
+        </p:nvSpPr>
+        <p:spPr>
+          <a:xfrm>
+            <a:off x="5760720" y="2971800"/>
+            <a:ext cx="3017520" cy="365760"/>
+          </a:xfrm>
+          <a:prstGeom prst="rect">
+            <a:avLst/>
+          </a:prstGeom>
+          <a:noFill/>
+          <a:ln>
+            <a:noFill/>
+          </a:ln>
+        </p:spPr>
+        <p:txBody>
+          <a:bodyPr wrap="square" lIns="0" tIns="0" rIns="0" bIns="0" anchor="t"/>
+          <a:lstStyle/>
+          <a:p>
+            <a:pPr algn="l">
               <a:buNone/>
             </a:pPr>
             <a:r>
@@ -23290,7 +23332,7 @@
         </p:nvSpPr>
         <p:spPr>
           <a:xfrm>
-            <a:off x="274320" y="4160520"/>
+            <a:off x="274320" y="3960000"/>
             <a:ext cx="8595360" cy="1005840"/>
           </a:xfrm>
           <a:prstGeom prst="rect">
@@ -23781,7 +23823,7 @@
         </p:nvSpPr>
         <p:spPr>
           <a:xfrm>
-            <a:off x="402336" y="2057400"/>
+            <a:off x="402336" y="1828800"/>
             <a:ext cx="1426464" cy="640080"/>
           </a:xfrm>
           <a:prstGeom prst="rect">
@@ -23822,7 +23864,7 @@
         </p:nvCxnSpPr>
         <p:spPr>
           <a:xfrm>
-            <a:off x="1842516" y="2377440"/>
+            <a:off x="1842516" y="2148840"/>
             <a:ext cx="274320" cy="0"/>
           </a:xfrm>
           <a:prstGeom prst="straightConnector1">
@@ -23844,7 +23886,7 @@
         </p:nvSpPr>
         <p:spPr>
           <a:xfrm>
-            <a:off x="2130408" y="2057400"/>
+            <a:off x="2130408" y="1828800"/>
             <a:ext cx="1426464" cy="640080"/>
           </a:xfrm>
           <a:prstGeom prst="rect">
@@ -23885,7 +23927,7 @@
         </p:nvCxnSpPr>
         <p:spPr>
           <a:xfrm>
-            <a:off x="3570588" y="2377440"/>
+            <a:off x="3570588" y="2148840"/>
             <a:ext cx="274320" cy="0"/>
           </a:xfrm>
           <a:prstGeom prst="straightConnector1">
@@ -23907,7 +23949,7 @@
         </p:nvSpPr>
         <p:spPr>
           <a:xfrm>
-            <a:off x="3858480" y="2057400"/>
+            <a:off x="3858480" y="1828800"/>
             <a:ext cx="1426464" cy="640080"/>
           </a:xfrm>
           <a:prstGeom prst="rect">
@@ -23948,7 +23990,7 @@
         </p:nvCxnSpPr>
         <p:spPr>
           <a:xfrm>
-            <a:off x="5298660" y="2377440"/>
+            <a:off x="5298660" y="2148840"/>
             <a:ext cx="274320" cy="0"/>
           </a:xfrm>
           <a:prstGeom prst="straightConnector1">
@@ -23970,7 +24012,7 @@
         </p:nvSpPr>
         <p:spPr>
           <a:xfrm>
-            <a:off x="5586552" y="2057400"/>
+            <a:off x="5586552" y="1828800"/>
             <a:ext cx="1426464" cy="640080"/>
           </a:xfrm>
           <a:prstGeom prst="rect">
@@ -24011,7 +24053,7 @@
         </p:nvCxnSpPr>
         <p:spPr>
           <a:xfrm>
-            <a:off x="7026732" y="2377440"/>
+            <a:off x="7026732" y="2148840"/>
             <a:ext cx="274320" cy="0"/>
           </a:xfrm>
           <a:prstGeom prst="straightConnector1">
@@ -24033,7 +24075,7 @@
         </p:nvSpPr>
         <p:spPr>
           <a:xfrm>
-            <a:off x="7314624" y="2057400"/>
+            <a:off x="7314624" y="1828800"/>
             <a:ext cx="1426464" cy="640080"/>
           </a:xfrm>
           <a:prstGeom prst="rect">
@@ -24074,7 +24116,7 @@
         </p:nvSpPr>
         <p:spPr>
           <a:xfrm>
-            <a:off x="274320" y="3154680"/>
+            <a:off x="274320" y="2926080"/>
             <a:ext cx="8595360" cy="411480"/>
           </a:xfrm>
           <a:prstGeom prst="rect">
@@ -24325,7 +24367,7 @@
         </p:nvSpPr>
         <p:spPr>
           <a:xfrm>
-            <a:off x="5029200" y="1371600"/>
+            <a:off x="4754880" y="1371600"/>
             <a:ext cx="3429000" cy="356616"/>
           </a:xfrm>
           <a:prstGeom prst="rect">
@@ -24404,7 +24446,7 @@
         <p:spPr>
           <a:xfrm>
             <a:off x="3977640" y="2148840"/>
-            <a:ext cx="960120" cy="0"/>
+            <a:ext cx="731520" cy="0"/>
           </a:xfrm>
           <a:prstGeom prst="straightConnector1">
             <a:avLst/>
@@ -24425,8 +24467,8 @@
         </p:nvSpPr>
         <p:spPr>
           <a:xfrm>
-            <a:off x="5029200" y="1828800"/>
-            <a:ext cx="3429000" cy="640080"/>
+            <a:off x="4754880" y="1828800"/>
+            <a:ext cx="3703320" cy="640080"/>
           </a:xfrm>
           <a:prstGeom prst="rect">
             <a:avLst/>
@@ -24466,7 +24508,7 @@
         </p:nvSpPr>
         <p:spPr>
           <a:xfrm>
-            <a:off x="685800" y="2606040"/>
+            <a:off x="685800" y="2697480"/>
             <a:ext cx="3200400" cy="640080"/>
           </a:xfrm>
           <a:prstGeom prst="rect">
@@ -24507,8 +24549,8 @@
         </p:nvCxnSpPr>
         <p:spPr>
           <a:xfrm>
-            <a:off x="3977640" y="2926080"/>
-            <a:ext cx="960120" cy="0"/>
+            <a:off x="3977640" y="3017520"/>
+            <a:ext cx="731520" cy="0"/>
           </a:xfrm>
           <a:prstGeom prst="straightConnector1">
             <a:avLst/>
@@ -24529,8 +24571,8 @@
         </p:nvSpPr>
         <p:spPr>
           <a:xfrm>
-            <a:off x="5029200" y="2606040"/>
-            <a:ext cx="3429000" cy="640080"/>
+            <a:off x="4754880" y="2697480"/>
+            <a:ext cx="3703320" cy="640080"/>
           </a:xfrm>
           <a:prstGeom prst="rect">
             <a:avLst/>
@@ -24570,7 +24612,7 @@
         </p:nvSpPr>
         <p:spPr>
           <a:xfrm>
-            <a:off x="685800" y="3383280"/>
+            <a:off x="685800" y="3566160"/>
             <a:ext cx="3200400" cy="640080"/>
           </a:xfrm>
           <a:prstGeom prst="rect">
@@ -24611,8 +24653,8 @@
         </p:nvCxnSpPr>
         <p:spPr>
           <a:xfrm>
-            <a:off x="3977640" y="3703320"/>
-            <a:ext cx="960120" cy="0"/>
+            <a:off x="3977640" y="3886200"/>
+            <a:ext cx="731520" cy="0"/>
           </a:xfrm>
           <a:prstGeom prst="straightConnector1">
             <a:avLst/>
@@ -24633,8 +24675,8 @@
         </p:nvSpPr>
         <p:spPr>
           <a:xfrm>
-            <a:off x="5029200" y="3383280"/>
-            <a:ext cx="3429000" cy="640080"/>
+            <a:off x="4754880" y="3566160"/>
+            <a:ext cx="3703320" cy="640080"/>
           </a:xfrm>
           <a:prstGeom prst="rect">
             <a:avLst/>
@@ -25002,7 +25044,7 @@
         </p:nvSpPr>
         <p:spPr>
           <a:xfrm>
-            <a:off x="502920" y="2057400"/>
+            <a:off x="411480" y="2057400"/>
             <a:ext cx="2377440" cy="1005840"/>
           </a:xfrm>
           <a:prstGeom prst="rect">
@@ -25059,7 +25101,7 @@
         </p:nvCxnSpPr>
         <p:spPr>
           <a:xfrm>
-            <a:off x="2971800" y="2560320"/>
+            <a:off x="2880360" y="2560320"/>
             <a:ext cx="411480" cy="0"/>
           </a:xfrm>
           <a:prstGeom prst="straightConnector1">
@@ -25081,7 +25123,7 @@
         </p:nvSpPr>
         <p:spPr>
           <a:xfrm>
-            <a:off x="3474720" y="2057400"/>
+            <a:off x="3383280" y="2057400"/>
             <a:ext cx="2377440" cy="1005840"/>
           </a:xfrm>
           <a:prstGeom prst="rect">
@@ -25138,7 +25180,7 @@
         </p:nvCxnSpPr>
         <p:spPr>
           <a:xfrm>
-            <a:off x="5943600" y="2560320"/>
+            <a:off x="5852160" y="2560320"/>
             <a:ext cx="411480" cy="0"/>
           </a:xfrm>
           <a:prstGeom prst="straightConnector1">
